--- a/sjoskolan/vecka-44/aktuell/v44_03_Fordjupad_matteknik_elev.pptx
+++ b/sjoskolan/vecka-44/aktuell/v44_03_Fordjupad_matteknik_elev.pptx
@@ -4566,7 +4566,40 @@
                 <a:ea typeface="Calibri"/>
                 <a:cs typeface="Calibri"/>
               </a:rPr>
-              <a:t>I = Utång/k</a:t>
+              <a:t>I = </a:t>
+            </a:r>
+            <a:r>
+              <a:rPr sz="2400" b="1">
+                <a:solidFill>
+                  <a:srgbClr val="064F91"/>
+                </a:solidFill>
+                <a:latin typeface="Calibri"/>
+                <a:ea typeface="Calibri"/>
+                <a:cs typeface="Calibri"/>
+              </a:rPr>
+              <a:t>U</a:t>
+            </a:r>
+            <a:r>
+              <a:rPr sz="2400" b="1" baseline="-25000">
+                <a:solidFill>
+                  <a:srgbClr val="064F91"/>
+                </a:solidFill>
+                <a:latin typeface="Calibri"/>
+                <a:ea typeface="Calibri"/>
+                <a:cs typeface="Calibri"/>
+              </a:rPr>
+              <a:t>tång</a:t>
+            </a:r>
+            <a:r>
+              <a:rPr sz="2400" b="1">
+                <a:solidFill>
+                  <a:srgbClr val="064F91"/>
+                </a:solidFill>
+                <a:latin typeface="Calibri"/>
+                <a:ea typeface="Calibri"/>
+                <a:cs typeface="Calibri"/>
+              </a:rPr>
+              <a:t>/k</a:t>
             </a:r>
           </a:p>
         </p:txBody>
@@ -4623,7 +4656,40 @@
                 <a:ea typeface="Calibri"/>
                 <a:cs typeface="Calibri"/>
               </a:rPr>
-              <a:t>k är tångens känslighet i mV/A. Utång är dess utspänning i mV. mV dividerat med mV/A ger A.</a:t>
+              <a:t>k är tångens känslighet i mV/A. </a:t>
+            </a:r>
+            <a:r>
+              <a:rPr sz="2100" b="0">
+                <a:solidFill>
+                  <a:srgbClr val="111111"/>
+                </a:solidFill>
+                <a:latin typeface="Calibri"/>
+                <a:ea typeface="Calibri"/>
+                <a:cs typeface="Calibri"/>
+              </a:rPr>
+              <a:t>U</a:t>
+            </a:r>
+            <a:r>
+              <a:rPr sz="2100" b="0" baseline="-25000">
+                <a:solidFill>
+                  <a:srgbClr val="111111"/>
+                </a:solidFill>
+                <a:latin typeface="Calibri"/>
+                <a:ea typeface="Calibri"/>
+                <a:cs typeface="Calibri"/>
+              </a:rPr>
+              <a:t>tång</a:t>
+            </a:r>
+            <a:r>
+              <a:rPr sz="2100" b="0">
+                <a:solidFill>
+                  <a:srgbClr val="111111"/>
+                </a:solidFill>
+                <a:latin typeface="Calibri"/>
+                <a:ea typeface="Calibri"/>
+                <a:cs typeface="Calibri"/>
+              </a:rPr>
+              <a:t> är dess utspänning i mV. mV dividerat med mV/A ger A.</a:t>
             </a:r>
           </a:p>
         </p:txBody>
@@ -5290,7 +5356,62 @@
                 <a:ea typeface="Calibri"/>
                 <a:cs typeface="Calibri"/>
               </a:rPr>
-              <a:t>R = Uprov/Iläck</a:t>
+              <a:t>R = </a:t>
+            </a:r>
+            <a:r>
+              <a:rPr sz="2400" b="1">
+                <a:solidFill>
+                  <a:srgbClr val="064F91"/>
+                </a:solidFill>
+                <a:latin typeface="Calibri"/>
+                <a:ea typeface="Calibri"/>
+                <a:cs typeface="Calibri"/>
+              </a:rPr>
+              <a:t>U</a:t>
+            </a:r>
+            <a:r>
+              <a:rPr sz="2400" b="1" baseline="-25000">
+                <a:solidFill>
+                  <a:srgbClr val="064F91"/>
+                </a:solidFill>
+                <a:latin typeface="Calibri"/>
+                <a:ea typeface="Calibri"/>
+                <a:cs typeface="Calibri"/>
+              </a:rPr>
+              <a:t>prov</a:t>
+            </a:r>
+            <a:r>
+              <a:rPr sz="2400" b="1">
+                <a:solidFill>
+                  <a:srgbClr val="064F91"/>
+                </a:solidFill>
+                <a:latin typeface="Calibri"/>
+                <a:ea typeface="Calibri"/>
+                <a:cs typeface="Calibri"/>
+              </a:rPr>
+              <a:t>/</a:t>
+            </a:r>
+            <a:r>
+              <a:rPr sz="2400" b="1">
+                <a:solidFill>
+                  <a:srgbClr val="064F91"/>
+                </a:solidFill>
+                <a:latin typeface="Calibri"/>
+                <a:ea typeface="Calibri"/>
+                <a:cs typeface="Calibri"/>
+              </a:rPr>
+              <a:t>I</a:t>
+            </a:r>
+            <a:r>
+              <a:rPr sz="2400" b="1" baseline="-25000">
+                <a:solidFill>
+                  <a:srgbClr val="064F91"/>
+                </a:solidFill>
+                <a:latin typeface="Calibri"/>
+                <a:ea typeface="Calibri"/>
+                <a:cs typeface="Calibri"/>
+              </a:rPr>
+              <a:t>läck</a:t>
             </a:r>
           </a:p>
         </p:txBody>
@@ -5347,7 +5468,62 @@
                 <a:ea typeface="Calibri"/>
                 <a:cs typeface="Calibri"/>
               </a:rPr>
-              <a:t>Uprov anges i V, Iläck i A och R i Ω. 1 mA = 0,001 A. 1 MΩ = 1 000 000 Ω.</a:t>
+              <a:t>U</a:t>
+            </a:r>
+            <a:r>
+              <a:rPr sz="2100" b="0" baseline="-25000">
+                <a:solidFill>
+                  <a:srgbClr val="111111"/>
+                </a:solidFill>
+                <a:latin typeface="Calibri"/>
+                <a:ea typeface="Calibri"/>
+                <a:cs typeface="Calibri"/>
+              </a:rPr>
+              <a:t>prov</a:t>
+            </a:r>
+            <a:r>
+              <a:rPr sz="2100" b="0">
+                <a:solidFill>
+                  <a:srgbClr val="111111"/>
+                </a:solidFill>
+                <a:latin typeface="Calibri"/>
+                <a:ea typeface="Calibri"/>
+                <a:cs typeface="Calibri"/>
+              </a:rPr>
+              <a:t> anges i V, </a:t>
+            </a:r>
+            <a:r>
+              <a:rPr sz="2100" b="0">
+                <a:solidFill>
+                  <a:srgbClr val="111111"/>
+                </a:solidFill>
+                <a:latin typeface="Calibri"/>
+                <a:ea typeface="Calibri"/>
+                <a:cs typeface="Calibri"/>
+              </a:rPr>
+              <a:t>I</a:t>
+            </a:r>
+            <a:r>
+              <a:rPr sz="2100" b="0" baseline="-25000">
+                <a:solidFill>
+                  <a:srgbClr val="111111"/>
+                </a:solidFill>
+                <a:latin typeface="Calibri"/>
+                <a:ea typeface="Calibri"/>
+                <a:cs typeface="Calibri"/>
+              </a:rPr>
+              <a:t>läck</a:t>
+            </a:r>
+            <a:r>
+              <a:rPr sz="2100" b="0">
+                <a:solidFill>
+                  <a:srgbClr val="111111"/>
+                </a:solidFill>
+                <a:latin typeface="Calibri"/>
+                <a:ea typeface="Calibri"/>
+                <a:cs typeface="Calibri"/>
+              </a:rPr>
+              <a:t> i A och R i Ω. 1 mA = 0,001 A. 1 MΩ = 1 000 000 Ω.</a:t>
             </a:r>
           </a:p>
         </p:txBody>
@@ -6426,7 +6602,7 @@
         <p:spPr>
           <a:xfrm xmlns:a="http://schemas.openxmlformats.org/drawingml/2006/main">
             <a:off x="762000" y="2533650"/>
-            <a:ext cx="7620000" cy="2286000"/>
+            <a:ext cx="3886200" cy="2606040"/>
           </a:xfrm>
           <a:prstGeom xmlns:a="http://schemas.openxmlformats.org/drawingml/2006/main" prst="rect">
             <a:avLst/>
@@ -6583,6 +6759,30 @@
           </a:p>
         </p:txBody>
       </p:sp>
+      <p:pic xmlns:a="http://schemas.openxmlformats.org/drawingml/2006/main" xmlns:r="http://schemas.openxmlformats.org/officeDocument/2006/relationships">
+        <p:nvPicPr>
+          <p:cNvPr id="9" name="Figur: Två isolationsvägar på 20 megaohm parall" descr="Två isolationsvägar på 20 megaohm parallellt mellan en aktiv ledare och jord; ekvivalent resistans okänd"/>
+          <p:cNvPicPr>
+            <a:picLocks noChangeAspect="1"/>
+          </p:cNvPicPr>
+          <p:nvPr/>
+        </p:nvPicPr>
+        <p:blipFill>
+          <a:blip r:embed="rId3"/>
+          <a:stretch>
+            <a:fillRect/>
+          </a:stretch>
+        </p:blipFill>
+        <p:spPr>
+          <a:xfrm>
+            <a:off x="4846320" y="2331720"/>
+            <a:ext cx="3931920" cy="2740984"/>
+          </a:xfrm>
+          <a:prstGeom prst="rect">
+            <a:avLst/>
+          </a:prstGeom>
+        </p:spPr>
+      </p:pic>
     </p:spTree>
     <p:extLst>
       <p:ext uri="{BB962C8B-B14F-4D97-AF65-F5344CB8AC3E}">
@@ -8172,7 +8372,7 @@
         <p:spPr>
           <a:xfrm xmlns:a="http://schemas.openxmlformats.org/drawingml/2006/main">
             <a:off x="762000" y="1619250"/>
-            <a:ext cx="7620000" cy="1466850"/>
+            <a:ext cx="3977639" cy="1466850"/>
           </a:xfrm>
           <a:prstGeom xmlns:a="http://schemas.openxmlformats.org/drawingml/2006/main" prst="rect">
             <a:avLst/>
@@ -8200,7 +8400,7 @@
               </a:defRPr>
             </a:pPr>
             <a:r>
-              <a:rPr sz="2400" b="0">
+              <a:rPr sz="1800" b="0">
                 <a:solidFill>
                   <a:srgbClr val="111111"/>
                 </a:solidFill>
@@ -8224,7 +8424,7 @@
               </a:defRPr>
             </a:pPr>
             <a:r>
-              <a:rPr sz="2400" b="0">
+              <a:rPr sz="1800" b="0">
                 <a:solidFill>
                   <a:srgbClr val="111111"/>
                 </a:solidFill>
@@ -8254,7 +8454,7 @@
         <p:spPr>
           <a:xfrm xmlns:a="http://schemas.openxmlformats.org/drawingml/2006/main">
             <a:off x="762000" y="3200400"/>
-            <a:ext cx="7620000" cy="838200"/>
+            <a:ext cx="3977639" cy="838200"/>
           </a:xfrm>
           <a:prstGeom xmlns:a="http://schemas.openxmlformats.org/drawingml/2006/main" prst="rect">
             <a:avLst/>
@@ -8282,7 +8482,7 @@
               </a:defRPr>
             </a:pPr>
             <a:r>
-              <a:rPr sz="2925" b="1">
+              <a:rPr sz="2300" b="1">
                 <a:solidFill>
                   <a:srgbClr val="064F91"/>
                 </a:solidFill>
@@ -8312,7 +8512,7 @@
         <p:spPr>
           <a:xfrm xmlns:a="http://schemas.openxmlformats.org/drawingml/2006/main">
             <a:off x="762000" y="4429125"/>
-            <a:ext cx="7620000" cy="1352550"/>
+            <a:ext cx="3977639" cy="1352550"/>
           </a:xfrm>
           <a:prstGeom xmlns:a="http://schemas.openxmlformats.org/drawingml/2006/main" prst="rect">
             <a:avLst/>
@@ -8340,7 +8540,7 @@
               </a:defRPr>
             </a:pPr>
             <a:r>
-              <a:rPr sz="2250" b="0">
+              <a:rPr sz="1700" b="0">
                 <a:solidFill>
                   <a:srgbClr val="111111"/>
                 </a:solidFill>
@@ -8364,7 +8564,7 @@
               </a:defRPr>
             </a:pPr>
             <a:r>
-              <a:rPr sz="2250" b="0">
+              <a:rPr sz="1700" b="0">
                 <a:solidFill>
                   <a:srgbClr val="111111"/>
                 </a:solidFill>
@@ -8435,6 +8635,30 @@
           </a:p>
         </p:txBody>
       </p:sp>
+      <p:pic xmlns:a="http://schemas.openxmlformats.org/drawingml/2006/main" xmlns:r="http://schemas.openxmlformats.org/officeDocument/2006/relationships">
+        <p:nvPicPr>
+          <p:cNvPr id="9" name="Figur: Oscilloskopets probjord är förbunden med" descr="Oscilloskopets probjord är förbunden med skyddsjorden; kopplas den till en spänningssatt ledare blir det kortslutning via skyddsjorden"/>
+          <p:cNvPicPr>
+            <a:picLocks noChangeAspect="1"/>
+          </p:cNvPicPr>
+          <p:nvPr/>
+        </p:nvPicPr>
+        <p:blipFill>
+          <a:blip r:embed="rId3"/>
+          <a:stretch>
+            <a:fillRect/>
+          </a:stretch>
+        </p:blipFill>
+        <p:spPr>
+          <a:xfrm>
+            <a:off x="4892040" y="1645920"/>
+            <a:ext cx="3886200" cy="2890202"/>
+          </a:xfrm>
+          <a:prstGeom prst="rect">
+            <a:avLst/>
+          </a:prstGeom>
+        </p:spPr>
+      </p:pic>
     </p:spTree>
     <p:extLst>
       <p:ext uri="{BB962C8B-B14F-4D97-AF65-F5344CB8AC3E}">
@@ -8556,7 +8780,7 @@
         <p:spPr>
           <a:xfrm xmlns:a="http://schemas.openxmlformats.org/drawingml/2006/main">
             <a:off x="762000" y="1619250"/>
-            <a:ext cx="7620000" cy="1466850"/>
+            <a:ext cx="3977639" cy="1466850"/>
           </a:xfrm>
           <a:prstGeom xmlns:a="http://schemas.openxmlformats.org/drawingml/2006/main" prst="rect">
             <a:avLst/>
@@ -8584,7 +8808,7 @@
               </a:defRPr>
             </a:pPr>
             <a:r>
-              <a:rPr sz="2400" b="0">
+              <a:rPr sz="1750" b="0">
                 <a:solidFill>
                   <a:srgbClr val="111111"/>
                 </a:solidFill>
@@ -8608,7 +8832,7 @@
               </a:defRPr>
             </a:pPr>
             <a:r>
-              <a:rPr sz="2400" b="0">
+              <a:rPr sz="1750" b="0">
                 <a:solidFill>
                   <a:srgbClr val="111111"/>
                 </a:solidFill>
@@ -8638,7 +8862,7 @@
         <p:spPr>
           <a:xfrm xmlns:a="http://schemas.openxmlformats.org/drawingml/2006/main">
             <a:off x="762000" y="3200400"/>
-            <a:ext cx="7620000" cy="838200"/>
+            <a:ext cx="3977639" cy="838200"/>
           </a:xfrm>
           <a:prstGeom xmlns:a="http://schemas.openxmlformats.org/drawingml/2006/main" prst="rect">
             <a:avLst/>
@@ -8666,7 +8890,7 @@
               </a:defRPr>
             </a:pPr>
             <a:r>
-              <a:rPr sz="2925" b="1">
+              <a:rPr sz="2200" b="1">
                 <a:solidFill>
                   <a:srgbClr val="064F91"/>
                 </a:solidFill>
@@ -8696,7 +8920,7 @@
         <p:spPr>
           <a:xfrm xmlns:a="http://schemas.openxmlformats.org/drawingml/2006/main">
             <a:off x="762000" y="4429125"/>
-            <a:ext cx="7620000" cy="1352550"/>
+            <a:ext cx="3977639" cy="1352550"/>
           </a:xfrm>
           <a:prstGeom xmlns:a="http://schemas.openxmlformats.org/drawingml/2006/main" prst="rect">
             <a:avLst/>
@@ -8724,15 +8948,15 @@
               </a:defRPr>
             </a:pPr>
             <a:r>
-              <a:rPr sz="2250" b="0">
-                <a:solidFill>
-                  <a:srgbClr val="111111"/>
-                </a:solidFill>
-                <a:latin typeface="Calibri"/>
-                <a:ea typeface="Calibri"/>
-                <a:cs typeface="Calibri"/>
-              </a:rPr>
-              <a:t>0,5 % av 100,0 V + 2 steg à 0,1 V ger ±0,7 V.</a:t>
+              <a:rPr sz="2050" b="0">
+                <a:solidFill>
+                  <a:srgbClr val="111111"/>
+                </a:solidFill>
+                <a:latin typeface="Calibri"/>
+                <a:ea typeface="Calibri"/>
+                <a:cs typeface="Calibri"/>
+              </a:rPr>
+              <a:t>1 % av 50,00 V + 3 steg à 0,01 V ger ±0,53 V.</a:t>
             </a:r>
           </a:p>
           <a:p xmlns:a="http://schemas.openxmlformats.org/drawingml/2006/main">
@@ -8748,7 +8972,7 @@
               </a:defRPr>
             </a:pPr>
             <a:r>
-              <a:rPr sz="2250" b="0">
+              <a:rPr sz="2050" b="0">
                 <a:solidFill>
                   <a:srgbClr val="111111"/>
                 </a:solidFill>
@@ -8819,6 +9043,30 @@
           </a:p>
         </p:txBody>
       </p:sp>
+      <p:pic xmlns:a="http://schemas.openxmlformats.org/drawingml/2006/main" xmlns:r="http://schemas.openxmlformats.org/officeDocument/2006/relationships">
+        <p:nvPicPr>
+          <p:cNvPr id="9" name="Figur: Visning 50,00 V med felgränsen ±0,53 V g" descr="Visning 50,00 V med felgränsen ±0,53 V ger intervallet 49,47 till 50,53 V"/>
+          <p:cNvPicPr>
+            <a:picLocks noChangeAspect="1"/>
+          </p:cNvPicPr>
+          <p:nvPr/>
+        </p:nvPicPr>
+        <p:blipFill>
+          <a:blip r:embed="rId3"/>
+          <a:stretch>
+            <a:fillRect/>
+          </a:stretch>
+        </p:blipFill>
+        <p:spPr>
+          <a:xfrm>
+            <a:off x="4892040" y="1645920"/>
+            <a:ext cx="3886200" cy="2169462"/>
+          </a:xfrm>
+          <a:prstGeom prst="rect">
+            <a:avLst/>
+          </a:prstGeom>
+        </p:spPr>
+      </p:pic>
     </p:spTree>
     <p:extLst>
       <p:ext uri="{BB962C8B-B14F-4D97-AF65-F5344CB8AC3E}">
@@ -9323,7 +9571,7 @@
         <p:spPr>
           <a:xfrm xmlns:a="http://schemas.openxmlformats.org/drawingml/2006/main">
             <a:off x="762000" y="1571625"/>
-            <a:ext cx="7620000" cy="990600"/>
+            <a:ext cx="3977639" cy="990600"/>
           </a:xfrm>
           <a:prstGeom xmlns:a="http://schemas.openxmlformats.org/drawingml/2006/main" prst="rect">
             <a:avLst/>
@@ -9350,15 +9598,15 @@
               </a:defRPr>
             </a:pPr>
             <a:r>
-              <a:rPr sz="2175" b="0">
-                <a:solidFill>
-                  <a:srgbClr val="111111"/>
-                </a:solidFill>
-                <a:latin typeface="Calibri"/>
-                <a:ea typeface="Calibri"/>
-                <a:cs typeface="Calibri"/>
-              </a:rPr>
-              <a:t>En hel period upptar 5 rutor à 2 ms. Visad topp är 1,5 V med 10:1-prob utan automatisk kompensation.</a:t>
+              <a:rPr sz="1650" b="0">
+                <a:solidFill>
+                  <a:srgbClr val="111111"/>
+                </a:solidFill>
+                <a:latin typeface="Calibri"/>
+                <a:ea typeface="Calibri"/>
+                <a:cs typeface="Calibri"/>
+              </a:rPr>
+              <a:t>En hel period upptar 5 rutor à 2 ms. Visad topp är 1,5 V med 10:1-prob utan automatisk kompensation.</a:t>
             </a:r>
           </a:p>
         </p:txBody>
@@ -9380,7 +9628,7 @@
         <p:spPr>
           <a:xfrm xmlns:a="http://schemas.openxmlformats.org/drawingml/2006/main">
             <a:off x="762000" y="2705100"/>
-            <a:ext cx="7620000" cy="790575"/>
+            <a:ext cx="3977639" cy="790575"/>
           </a:xfrm>
           <a:prstGeom xmlns:a="http://schemas.openxmlformats.org/drawingml/2006/main" prst="rect">
             <a:avLst/>
@@ -9407,7 +9655,7 @@
               </a:defRPr>
             </a:pPr>
             <a:r>
-              <a:rPr sz="2325" b="1">
+              <a:rPr sz="1850" b="1">
                 <a:solidFill>
                   <a:srgbClr val="064F91"/>
                 </a:solidFill>
@@ -9415,7 +9663,7 @@
                 <a:ea typeface="Calibri"/>
                 <a:cs typeface="Calibri"/>
               </a:rPr>
-              <a:t>T = rutor · tidsbas     f = 1/T</a:t>
+              <a:t>T = rutor · tidsbas     f = 1/T</a:t>
             </a:r>
           </a:p>
           <a:p xmlns:a="http://schemas.openxmlformats.org/drawingml/2006/main">
@@ -9430,7 +9678,7 @@
               </a:defRPr>
             </a:pPr>
             <a:r>
-              <a:rPr sz="2325" b="1">
+              <a:rPr sz="1850" b="1">
                 <a:solidFill>
                   <a:srgbClr val="064F91"/>
                 </a:solidFill>
@@ -9438,7 +9686,29 @@
                 <a:ea typeface="Calibri"/>
                 <a:cs typeface="Calibri"/>
               </a:rPr>
-              <a:t>û = probfaktor · ûvisad</a:t>
+              <a:t>û = probfaktor · </a:t>
+            </a:r>
+            <a:r>
+              <a:rPr sz="1850" b="1">
+                <a:solidFill>
+                  <a:srgbClr val="064F91"/>
+                </a:solidFill>
+                <a:latin typeface="Calibri"/>
+                <a:ea typeface="Calibri"/>
+                <a:cs typeface="Calibri"/>
+              </a:rPr>
+              <a:t>û</a:t>
+            </a:r>
+            <a:r>
+              <a:rPr sz="1850" b="1" baseline="-25000">
+                <a:solidFill>
+                  <a:srgbClr val="064F91"/>
+                </a:solidFill>
+                <a:latin typeface="Calibri"/>
+                <a:ea typeface="Calibri"/>
+                <a:cs typeface="Calibri"/>
+              </a:rPr>
+              <a:t>visad</a:t>
             </a:r>
           </a:p>
         </p:txBody>
@@ -9460,7 +9730,7 @@
         <p:spPr>
           <a:xfrm xmlns:a="http://schemas.openxmlformats.org/drawingml/2006/main">
             <a:off x="762000" y="3657600"/>
-            <a:ext cx="7620000" cy="1524000"/>
+            <a:ext cx="3977639" cy="1524000"/>
           </a:xfrm>
           <a:prstGeom xmlns:a="http://schemas.openxmlformats.org/drawingml/2006/main" prst="rect">
             <a:avLst/>
@@ -9495,7 +9765,7 @@
                 <a:ea typeface="Calibri"/>
                 <a:cs typeface="Calibri"/>
               </a:rPr>
-              <a:t>1. T = 5 · 2 = 10 ms = 0,010 s.</a:t>
+              <a:t>1. T = 5 · 2 = 10 ms = 0,010 s.</a:t>
             </a:r>
           </a:p>
           <a:p xmlns:a="http://schemas.openxmlformats.org/drawingml/2006/main">
@@ -9518,7 +9788,7 @@
                 <a:ea typeface="Calibri"/>
                 <a:cs typeface="Calibri"/>
               </a:rPr>
-              <a:t>2. f = 1/0,010 = 100 Hz.</a:t>
+              <a:t>2. f = 1/0,010 = 100 Hz.</a:t>
             </a:r>
           </a:p>
           <a:p xmlns:a="http://schemas.openxmlformats.org/drawingml/2006/main">
@@ -9541,7 +9811,7 @@
                 <a:ea typeface="Calibri"/>
                 <a:cs typeface="Calibri"/>
               </a:rPr>
-              <a:t>3. û = 10 · 1,5 = 15 V.</a:t>
+              <a:t>3. û = 10 · 1,5 = 15 V.</a:t>
             </a:r>
           </a:p>
         </p:txBody>
@@ -9563,7 +9833,7 @@
         <p:spPr>
           <a:xfrm xmlns:a="http://schemas.openxmlformats.org/drawingml/2006/main">
             <a:off x="762000" y="5372100"/>
-            <a:ext cx="7620000" cy="685800"/>
+            <a:ext cx="3977639" cy="685800"/>
           </a:xfrm>
           <a:prstGeom xmlns:a="http://schemas.openxmlformats.org/drawingml/2006/main" prst="rect">
             <a:avLst/>
@@ -9590,7 +9860,7 @@
               </a:defRPr>
             </a:pPr>
             <a:r>
-              <a:rPr sz="1913" b="0">
+              <a:rPr sz="1550" b="0">
                 <a:solidFill>
                   <a:srgbClr val="111111"/>
                 </a:solidFill>
@@ -9660,6 +9930,30 @@
           </a:p>
         </p:txBody>
       </p:sp>
+      <p:pic xmlns:a="http://schemas.openxmlformats.org/drawingml/2006/main" xmlns:r="http://schemas.openxmlformats.org/officeDocument/2006/relationships">
+        <p:nvPicPr>
+          <p:cNvPr id="16" name="Figur: Oscilloskopskärm med sinus: en period på" descr="Oscilloskopskärm med sinus: en period på fem rutor vid 2 ms per ruta, 10:1-prob"/>
+          <p:cNvPicPr>
+            <a:picLocks noChangeAspect="1"/>
+          </p:cNvPicPr>
+          <p:nvPr/>
+        </p:nvPicPr>
+        <p:blipFill>
+          <a:blip r:embed="rId3"/>
+          <a:stretch>
+            <a:fillRect/>
+          </a:stretch>
+        </p:blipFill>
+        <p:spPr>
+          <a:xfrm>
+            <a:off x="4892040" y="1645920"/>
+            <a:ext cx="3886200" cy="2890202"/>
+          </a:xfrm>
+          <a:prstGeom prst="rect">
+            <a:avLst/>
+          </a:prstGeom>
+        </p:spPr>
+      </p:pic>
     </p:spTree>
     <p:extLst>
       <p:ext uri="{BB962C8B-B14F-4D97-AF65-F5344CB8AC3E}">
@@ -10227,7 +10521,7 @@
         <p:spPr>
           <a:xfrm xmlns:a="http://schemas.openxmlformats.org/drawingml/2006/main">
             <a:off x="762000" y="2533650"/>
-            <a:ext cx="7620000" cy="2286000"/>
+            <a:ext cx="3886200" cy="2606040"/>
           </a:xfrm>
           <a:prstGeom xmlns:a="http://schemas.openxmlformats.org/drawingml/2006/main" prst="rect">
             <a:avLst/>
@@ -10263,7 +10557,7 @@
                 <a:ea typeface="Calibri"/>
                 <a:cs typeface="Calibri"/>
               </a:rPr>
-              <a:t>En period täcker fyra rutor. Tidsbasen är 5 ms/ruta. Beräkna period och frekvens.</a:t>
+              <a:t>En period täcker fyra rutor. Tidsbasen är 5 ms/ruta. Beräkna period och frekvens.</a:t>
             </a:r>
           </a:p>
         </p:txBody>
@@ -10384,6 +10678,30 @@
           </a:p>
         </p:txBody>
       </p:sp>
+      <p:pic xmlns:a="http://schemas.openxmlformats.org/drawingml/2006/main" xmlns:r="http://schemas.openxmlformats.org/officeDocument/2006/relationships">
+        <p:nvPicPr>
+          <p:cNvPr id="9" name="Figur: Oscilloskopskärm där en period täcker fy" descr="Oscilloskopskärm där en period täcker fyra rutor vid 5 ms per ruta; period och frekvens okända"/>
+          <p:cNvPicPr>
+            <a:picLocks noChangeAspect="1"/>
+          </p:cNvPicPr>
+          <p:nvPr/>
+        </p:nvPicPr>
+        <p:blipFill>
+          <a:blip r:embed="rId3"/>
+          <a:stretch>
+            <a:fillRect/>
+          </a:stretch>
+        </p:blipFill>
+        <p:spPr>
+          <a:xfrm>
+            <a:off x="4906535" y="2331720"/>
+            <a:ext cx="3811489" cy="2834639"/>
+          </a:xfrm>
+          <a:prstGeom prst="rect">
+            <a:avLst/>
+          </a:prstGeom>
+        </p:spPr>
+      </p:pic>
     </p:spTree>
     <p:extLst>
       <p:ext uri="{BB962C8B-B14F-4D97-AF65-F5344CB8AC3E}">
@@ -10539,7 +10857,51 @@
                 <a:ea typeface="Calibri"/>
                 <a:cs typeface="Calibri"/>
               </a:rPr>
-              <a:t>ûverklig = probfaktor · ûvisad</a:t>
+              <a:t>û</a:t>
+            </a:r>
+            <a:r>
+              <a:rPr sz="2400" b="1" baseline="-25000">
+                <a:solidFill>
+                  <a:srgbClr val="064F91"/>
+                </a:solidFill>
+                <a:latin typeface="Calibri"/>
+                <a:ea typeface="Calibri"/>
+                <a:cs typeface="Calibri"/>
+              </a:rPr>
+              <a:t>verklig</a:t>
+            </a:r>
+            <a:r>
+              <a:rPr sz="2400" b="1">
+                <a:solidFill>
+                  <a:srgbClr val="064F91"/>
+                </a:solidFill>
+                <a:latin typeface="Calibri"/>
+                <a:ea typeface="Calibri"/>
+                <a:cs typeface="Calibri"/>
+              </a:rPr>
+              <a:t> = probfaktor · </a:t>
+            </a:r>
+            <a:r>
+              <a:rPr sz="2400" b="1">
+                <a:solidFill>
+                  <a:srgbClr val="064F91"/>
+                </a:solidFill>
+                <a:latin typeface="Calibri"/>
+                <a:ea typeface="Calibri"/>
+                <a:cs typeface="Calibri"/>
+              </a:rPr>
+              <a:t>û</a:t>
+            </a:r>
+            <a:r>
+              <a:rPr sz="2400" b="1" baseline="-25000">
+                <a:solidFill>
+                  <a:srgbClr val="064F91"/>
+                </a:solidFill>
+                <a:latin typeface="Calibri"/>
+                <a:ea typeface="Calibri"/>
+                <a:cs typeface="Calibri"/>
+              </a:rPr>
+              <a:t>visad</a:t>
             </a:r>
           </a:p>
         </p:txBody>
@@ -12547,7 +12909,62 @@
                 <a:ea typeface="Calibri"/>
                 <a:cs typeface="Calibri"/>
               </a:rPr>
-              <a:t>Variationsbredd = xmax − xmin</a:t>
+              <a:t>Variationsbredd = </a:t>
+            </a:r>
+            <a:r>
+              <a:rPr sz="2400" b="1">
+                <a:solidFill>
+                  <a:srgbClr val="064F91"/>
+                </a:solidFill>
+                <a:latin typeface="Calibri"/>
+                <a:ea typeface="Calibri"/>
+                <a:cs typeface="Calibri"/>
+              </a:rPr>
+              <a:t>x</a:t>
+            </a:r>
+            <a:r>
+              <a:rPr sz="2400" b="1" baseline="-25000">
+                <a:solidFill>
+                  <a:srgbClr val="064F91"/>
+                </a:solidFill>
+                <a:latin typeface="Calibri"/>
+                <a:ea typeface="Calibri"/>
+                <a:cs typeface="Calibri"/>
+              </a:rPr>
+              <a:t>max</a:t>
+            </a:r>
+            <a:r>
+              <a:rPr sz="2400" b="1">
+                <a:solidFill>
+                  <a:srgbClr val="064F91"/>
+                </a:solidFill>
+                <a:latin typeface="Calibri"/>
+                <a:ea typeface="Calibri"/>
+                <a:cs typeface="Calibri"/>
+              </a:rPr>
+              <a:t> − </a:t>
+            </a:r>
+            <a:r>
+              <a:rPr sz="2400" b="1">
+                <a:solidFill>
+                  <a:srgbClr val="064F91"/>
+                </a:solidFill>
+                <a:latin typeface="Calibri"/>
+                <a:ea typeface="Calibri"/>
+                <a:cs typeface="Calibri"/>
+              </a:rPr>
+              <a:t>x</a:t>
+            </a:r>
+            <a:r>
+              <a:rPr sz="2400" b="1" baseline="-25000">
+                <a:solidFill>
+                  <a:srgbClr val="064F91"/>
+                </a:solidFill>
+                <a:latin typeface="Calibri"/>
+                <a:ea typeface="Calibri"/>
+                <a:cs typeface="Calibri"/>
+              </a:rPr>
+              <a:t>min</a:t>
             </a:r>
           </a:p>
         </p:txBody>
@@ -14542,64 +14959,6 @@
       </p:sp>
       <p:sp>
         <p:nvSpPr>
-          <p:cNvPr id="8" name="Källor och lärarstöd finns även i bildanteckningarna.">
-            <a:extLst xmlns:a="http://schemas.openxmlformats.org/drawingml/2006/main">
-              <a:ext uri="{FF2B5EF4-FFF2-40B4-BE49-F238E27FC236}">
-                <a16:creationId xmlns:a16="http://schemas.microsoft.com/office/drawing/2014/main" id="{C173AB69-DFB3-4082-825F-155CFEDE8205}"/>
-              </a:ext>
-            </a:extLst>
-          </p:cNvPr>
-          <p:cNvSpPr>
-            <a:spLocks xmlns:a="http://schemas.openxmlformats.org/drawingml/2006/main" noGrp="1"/>
-          </p:cNvSpPr>
-          <p:nvPr/>
-        </p:nvSpPr>
-        <p:spPr>
-          <a:xfrm xmlns:a="http://schemas.openxmlformats.org/drawingml/2006/main">
-            <a:off x="762000" y="5676900"/>
-            <a:ext cx="7620000" cy="352425"/>
-          </a:xfrm>
-          <a:prstGeom xmlns:a="http://schemas.openxmlformats.org/drawingml/2006/main" prst="rect">
-            <a:avLst/>
-          </a:prstGeom>
-          <a:noFill xmlns:a="http://schemas.openxmlformats.org/drawingml/2006/main"/>
-          <a:ln xmlns:a="http://schemas.openxmlformats.org/drawingml/2006/main" w="0">
-            <a:noFill/>
-          </a:ln>
-        </p:spPr>
-        <p:txBody>
-          <a:bodyPr xmlns:a="http://schemas.openxmlformats.org/drawingml/2006/main" wrap="square" lIns="0" tIns="0" rIns="0" bIns="0" anchor="t">
-            <a:noAutofit/>
-          </a:bodyPr>
-          <a:lstStyle xmlns:a="http://schemas.openxmlformats.org/drawingml/2006/main"/>
-          <a:p xmlns:a="http://schemas.openxmlformats.org/drawingml/2006/main">
-            <a:pPr algn="l">
-              <a:buNone/>
-              <a:defRPr sz="1800" b="0">
-                <a:solidFill>
-                  <a:srgbClr val="111111"/>
-                </a:solidFill>
-                <a:latin typeface="Calibri"/>
-                <a:ea typeface="Calibri"/>
-                <a:cs typeface="Calibri"/>
-              </a:defRPr>
-            </a:pPr>
-            <a:r>
-              <a:rPr sz="1800" b="0">
-                <a:solidFill>
-                  <a:srgbClr val="111111"/>
-                </a:solidFill>
-                <a:latin typeface="Calibri"/>
-                <a:ea typeface="Calibri"/>
-                <a:cs typeface="Calibri"/>
-              </a:rPr>
-              <a:t>Källor och lärarstöd finns även i bildanteckningarna.</a:t>
-            </a:r>
-          </a:p>
-        </p:txBody>
-      </p:sp>
-      <p:sp>
-        <p:nvSpPr>
           <p:cNvPr id="9" name="22">
             <a:extLst xmlns:a="http://schemas.openxmlformats.org/drawingml/2006/main">
               <a:ext uri="{FF2B5EF4-FFF2-40B4-BE49-F238E27FC236}">
@@ -15690,7 +16049,7 @@
         <p:spPr>
           <a:xfrm xmlns:a="http://schemas.openxmlformats.org/drawingml/2006/main">
             <a:off x="762000" y="1619250"/>
-            <a:ext cx="7620000" cy="1466850"/>
+            <a:ext cx="3977639" cy="1466850"/>
           </a:xfrm>
           <a:prstGeom xmlns:a="http://schemas.openxmlformats.org/drawingml/2006/main" prst="rect">
             <a:avLst/>
@@ -15718,7 +16077,7 @@
               </a:defRPr>
             </a:pPr>
             <a:r>
-              <a:rPr sz="2400" b="0">
+              <a:rPr sz="1800" b="0">
                 <a:solidFill>
                   <a:srgbClr val="111111"/>
                 </a:solidFill>
@@ -15742,7 +16101,7 @@
               </a:defRPr>
             </a:pPr>
             <a:r>
-              <a:rPr sz="2400" b="0">
+              <a:rPr sz="1800" b="0">
                 <a:solidFill>
                   <a:srgbClr val="111111"/>
                 </a:solidFill>
@@ -15772,7 +16131,7 @@
         <p:spPr>
           <a:xfrm xmlns:a="http://schemas.openxmlformats.org/drawingml/2006/main">
             <a:off x="762000" y="3200400"/>
-            <a:ext cx="7620000" cy="838200"/>
+            <a:ext cx="3977639" cy="838200"/>
           </a:xfrm>
           <a:prstGeom xmlns:a="http://schemas.openxmlformats.org/drawingml/2006/main" prst="rect">
             <a:avLst/>
@@ -15800,7 +16159,7 @@
               </a:defRPr>
             </a:pPr>
             <a:r>
-              <a:rPr sz="2925" b="1">
+              <a:rPr sz="2650" b="1">
                 <a:solidFill>
                   <a:srgbClr val="064F91"/>
                 </a:solidFill>
@@ -15830,7 +16189,7 @@
         <p:spPr>
           <a:xfrm xmlns:a="http://schemas.openxmlformats.org/drawingml/2006/main">
             <a:off x="762000" y="4429125"/>
-            <a:ext cx="7620000" cy="1352550"/>
+            <a:ext cx="3977639" cy="1352550"/>
           </a:xfrm>
           <a:prstGeom xmlns:a="http://schemas.openxmlformats.org/drawingml/2006/main" prst="rect">
             <a:avLst/>
@@ -15858,7 +16217,7 @@
               </a:defRPr>
             </a:pPr>
             <a:r>
-              <a:rPr sz="2250" b="0">
+              <a:rPr sz="1850" b="0">
                 <a:solidFill>
                   <a:srgbClr val="111111"/>
                 </a:solidFill>
@@ -15882,7 +16241,7 @@
               </a:defRPr>
             </a:pPr>
             <a:r>
-              <a:rPr sz="2250" b="0">
+              <a:rPr sz="1850" b="0">
                 <a:solidFill>
                   <a:srgbClr val="111111"/>
                 </a:solidFill>
@@ -15953,6 +16312,30 @@
           </a:p>
         </p:txBody>
       </p:sp>
+      <p:pic xmlns:a="http://schemas.openxmlformats.org/drawingml/2006/main" xmlns:r="http://schemas.openxmlformats.org/officeDocument/2006/relationships">
+        <p:nvPicPr>
+          <p:cNvPr id="9" name="Figur: Strömtång runt en ledare visar lastström" descr="Strömtång runt en ledare visar lastströmmen; runt fram- och returledaren motverkar bidragen varandra"/>
+          <p:cNvPicPr>
+            <a:picLocks noChangeAspect="1"/>
+          </p:cNvPicPr>
+          <p:nvPr/>
+        </p:nvPicPr>
+        <p:blipFill>
+          <a:blip r:embed="rId3"/>
+          <a:stretch>
+            <a:fillRect/>
+          </a:stretch>
+        </p:blipFill>
+        <p:spPr>
+          <a:xfrm>
+            <a:off x="4892040" y="1645920"/>
+            <a:ext cx="3886200" cy="2709112"/>
+          </a:xfrm>
+          <a:prstGeom prst="rect">
+            <a:avLst/>
+          </a:prstGeom>
+        </p:spPr>
+      </p:pic>
     </p:spTree>
     <p:extLst>
       <p:ext uri="{BB962C8B-B14F-4D97-AF65-F5344CB8AC3E}">
@@ -16074,7 +16457,7 @@
         <p:spPr>
           <a:xfrm xmlns:a="http://schemas.openxmlformats.org/drawingml/2006/main">
             <a:off x="762000" y="1619250"/>
-            <a:ext cx="7620000" cy="1466850"/>
+            <a:ext cx="3977639" cy="1466850"/>
           </a:xfrm>
           <a:prstGeom xmlns:a="http://schemas.openxmlformats.org/drawingml/2006/main" prst="rect">
             <a:avLst/>
@@ -16102,7 +16485,7 @@
               </a:defRPr>
             </a:pPr>
             <a:r>
-              <a:rPr sz="2400" b="0">
+              <a:rPr sz="1800" b="0">
                 <a:solidFill>
                   <a:srgbClr val="111111"/>
                 </a:solidFill>
@@ -16126,7 +16509,7 @@
               </a:defRPr>
             </a:pPr>
             <a:r>
-              <a:rPr sz="2400" b="0">
+              <a:rPr sz="1800" b="0">
                 <a:solidFill>
                   <a:srgbClr val="111111"/>
                 </a:solidFill>
@@ -16156,7 +16539,7 @@
         <p:spPr>
           <a:xfrm xmlns:a="http://schemas.openxmlformats.org/drawingml/2006/main">
             <a:off x="762000" y="3200400"/>
-            <a:ext cx="7620000" cy="838200"/>
+            <a:ext cx="3977639" cy="838200"/>
           </a:xfrm>
           <a:prstGeom xmlns:a="http://schemas.openxmlformats.org/drawingml/2006/main" prst="rect">
             <a:avLst/>
@@ -16184,7 +16567,7 @@
               </a:defRPr>
             </a:pPr>
             <a:r>
-              <a:rPr sz="2925" b="1">
+              <a:rPr sz="2500" b="1">
                 <a:solidFill>
                   <a:srgbClr val="064F91"/>
                 </a:solidFill>
@@ -16214,7 +16597,7 @@
         <p:spPr>
           <a:xfrm xmlns:a="http://schemas.openxmlformats.org/drawingml/2006/main">
             <a:off x="762000" y="4429125"/>
-            <a:ext cx="7620000" cy="1352550"/>
+            <a:ext cx="3977639" cy="1352550"/>
           </a:xfrm>
           <a:prstGeom xmlns:a="http://schemas.openxmlformats.org/drawingml/2006/main" prst="rect">
             <a:avLst/>
@@ -16242,7 +16625,7 @@
               </a:defRPr>
             </a:pPr>
             <a:r>
-              <a:rPr sz="2250" b="0">
+              <a:rPr sz="1700" b="0">
                 <a:solidFill>
                   <a:srgbClr val="111111"/>
                 </a:solidFill>
@@ -16266,7 +16649,7 @@
               </a:defRPr>
             </a:pPr>
             <a:r>
-              <a:rPr sz="2250" b="0">
+              <a:rPr sz="1700" b="0">
                 <a:solidFill>
                   <a:srgbClr val="111111"/>
                 </a:solidFill>
@@ -16337,6 +16720,30 @@
           </a:p>
         </p:txBody>
       </p:sp>
+      <p:pic xmlns:a="http://schemas.openxmlformats.org/drawingml/2006/main" xmlns:r="http://schemas.openxmlformats.org/officeDocument/2006/relationships">
+        <p:nvPicPr>
+          <p:cNvPr id="9" name="Figur: Isolationsprovare mellan kabelns ledare " descr="Isolationsprovare mellan kabelns ledare och skrovet; provspänning och läckström genom isolationsresistansen"/>
+          <p:cNvPicPr>
+            <a:picLocks noChangeAspect="1"/>
+          </p:cNvPicPr>
+          <p:nvPr/>
+        </p:nvPicPr>
+        <p:blipFill>
+          <a:blip r:embed="rId3"/>
+          <a:stretch>
+            <a:fillRect/>
+          </a:stretch>
+        </p:blipFill>
+        <p:spPr>
+          <a:xfrm>
+            <a:off x="4892040" y="1645920"/>
+            <a:ext cx="3886200" cy="2890202"/>
+          </a:xfrm>
+          <a:prstGeom prst="rect">
+            <a:avLst/>
+          </a:prstGeom>
+        </p:spPr>
+      </p:pic>
     </p:spTree>
     <p:extLst>
       <p:ext uri="{BB962C8B-B14F-4D97-AF65-F5344CB8AC3E}">

--- a/sjoskolan/vecka-44/aktuell/v44_03_Fordjupad_matteknik_elev.pptx
+++ b/sjoskolan/vecka-44/aktuell/v44_03_Fordjupad_matteknik_elev.pptx
@@ -8540,15 +8540,15 @@
               </a:defRPr>
             </a:pPr>
             <a:r>
-              <a:rPr sz="1700" b="0">
-                <a:solidFill>
-                  <a:srgbClr val="111111"/>
-                </a:solidFill>
-                <a:latin typeface="Calibri"/>
-                <a:ea typeface="Calibri"/>
-                <a:cs typeface="Calibri"/>
-              </a:rPr>
-              <a:t>Flytande mätningar kräver avsedd differential- eller isolerad lösning.</a:t>
+              <a:rPr sz="1650" b="0">
+                <a:solidFill>
+                  <a:srgbClr val="111111"/>
+                </a:solidFill>
+                <a:latin typeface="Calibri"/>
+                <a:ea typeface="Calibri"/>
+                <a:cs typeface="Calibri"/>
+              </a:rPr>
+              <a:t>Flytande mätningar kräver differentialprob med rätt mätkategori.</a:t>
             </a:r>
           </a:p>
           <a:p xmlns:a="http://schemas.openxmlformats.org/drawingml/2006/main">
@@ -8564,15 +8564,15 @@
               </a:defRPr>
             </a:pPr>
             <a:r>
-              <a:rPr sz="1700" b="0">
-                <a:solidFill>
-                  <a:srgbClr val="111111"/>
-                </a:solidFill>
-                <a:latin typeface="Calibri"/>
-                <a:ea typeface="Calibri"/>
-                <a:cs typeface="Calibri"/>
-              </a:rPr>
-              <a:t>Skyddsjorden får inte kopplas bort för att ”flyta” instrumentet.</a:t>
+              <a:rPr sz="1650" b="0">
+                <a:solidFill>
+                  <a:srgbClr val="111111"/>
+                </a:solidFill>
+                <a:latin typeface="Calibri"/>
+                <a:ea typeface="Calibri"/>
+                <a:cs typeface="Calibri"/>
+              </a:rPr>
+              <a:t>I IT-nät ger probjord på en fas ett jordfel och larm, och kortslutning om ett annat fel redan finns.</a:t>
             </a:r>
           </a:p>
         </p:txBody>
@@ -16217,15 +16217,15 @@
               </a:defRPr>
             </a:pPr>
             <a:r>
-              <a:rPr sz="1850" b="0">
-                <a:solidFill>
-                  <a:srgbClr val="111111"/>
-                </a:solidFill>
-                <a:latin typeface="Calibri"/>
-                <a:ea typeface="Calibri"/>
-                <a:cs typeface="Calibri"/>
-              </a:rPr>
-              <a:t>AC-tång och AC/DC-tång har olika mätförmåga.</a:t>
+              <a:rPr sz="1700" b="0">
+                <a:solidFill>
+                  <a:srgbClr val="111111"/>
+                </a:solidFill>
+                <a:latin typeface="Calibri"/>
+                <a:ea typeface="Calibri"/>
+                <a:cs typeface="Calibri"/>
+              </a:rPr>
+              <a:t>Alla faser genom tången: summan är läckströmmen. Så spåras jordfel matning för matning.</a:t>
             </a:r>
           </a:p>
           <a:p xmlns:a="http://schemas.openxmlformats.org/drawingml/2006/main">
@@ -16241,15 +16241,15 @@
               </a:defRPr>
             </a:pPr>
             <a:r>
-              <a:rPr sz="1850" b="0">
-                <a:solidFill>
-                  <a:srgbClr val="111111"/>
-                </a:solidFill>
-                <a:latin typeface="Calibri"/>
-                <a:ea typeface="Calibri"/>
-                <a:cs typeface="Calibri"/>
-              </a:rPr>
-              <a:t>Kontrollera område, nollning och signalens frekvensinnehåll.</a:t>
+              <a:rPr sz="1700" b="0">
+                <a:solidFill>
+                  <a:srgbClr val="111111"/>
+                </a:solidFill>
+                <a:latin typeface="Calibri"/>
+                <a:ea typeface="Calibri"/>
+                <a:cs typeface="Calibri"/>
+              </a:rPr>
+              <a:t>Vid frekvensomriktare: true RMS och mätning på nätsidan.</a:t>
             </a:r>
           </a:p>
         </p:txBody>
@@ -16625,15 +16625,15 @@
               </a:defRPr>
             </a:pPr>
             <a:r>
-              <a:rPr sz="1700" b="0">
-                <a:solidFill>
-                  <a:srgbClr val="111111"/>
-                </a:solidFill>
-                <a:latin typeface="Calibri"/>
-                <a:ea typeface="Calibri"/>
-                <a:cs typeface="Calibri"/>
-              </a:rPr>
-              <a:t>Känslig elektronik och lagrad laddning kräver särskild hantering.</a:t>
+              <a:rPr sz="1650" b="0">
+                <a:solidFill>
+                  <a:srgbClr val="111111"/>
+                </a:solidFill>
+                <a:latin typeface="Calibri"/>
+                <a:ea typeface="Calibri"/>
+                <a:cs typeface="Calibri"/>
+              </a:rPr>
+              <a:t>Verifiera spänningslöshet. Koppla bort isolationsvakt, omriktare och elektronik.</a:t>
             </a:r>
           </a:p>
           <a:p xmlns:a="http://schemas.openxmlformats.org/drawingml/2006/main">
@@ -16649,15 +16649,15 @@
               </a:defRPr>
             </a:pPr>
             <a:r>
-              <a:rPr sz="1700" b="0">
-                <a:solidFill>
-                  <a:srgbClr val="111111"/>
-                </a:solidFill>
-                <a:latin typeface="Calibri"/>
-                <a:ea typeface="Calibri"/>
-                <a:cs typeface="Calibri"/>
-              </a:rPr>
-              <a:t>I detta distanspass används endast givna mätdata.</a:t>
+              <a:rPr sz="1650" b="0">
+                <a:solidFill>
+                  <a:srgbClr val="111111"/>
+                </a:solidFill>
+                <a:latin typeface="Calibri"/>
+                <a:ea typeface="Calibri"/>
+                <a:cs typeface="Calibri"/>
+              </a:rPr>
+              <a:t>Normalt 500 V DC för 440 V-nät. Urladda till jord efter provningen.</a:t>
             </a:r>
           </a:p>
         </p:txBody>

--- a/sjoskolan/vecka-44/aktuell/v44_03_Fordjupad_matteknik_elev.pptx
+++ b/sjoskolan/vecka-44/aktuell/v44_03_Fordjupad_matteknik_elev.pptx
@@ -3512,6 +3512,10 @@
             <a:noFill/>
           </a:ln>
         </p:spPr>
+        <p:txBody xmlns:a="http://schemas.openxmlformats.org/drawingml/2006/main">
+          <a:bodyPr/>
+          <a:p/>
+        </p:txBody>
       </p:sp>
       <p:sp>
         <p:nvSpPr>
@@ -16217,15 +16221,15 @@
               </a:defRPr>
             </a:pPr>
             <a:r>
-              <a:rPr sz="1700" b="0">
-                <a:solidFill>
-                  <a:srgbClr val="111111"/>
-                </a:solidFill>
-                <a:latin typeface="Calibri"/>
-                <a:ea typeface="Calibri"/>
-                <a:cs typeface="Calibri"/>
-              </a:rPr>
-              <a:t>Alla faser genom tången: summan är läckströmmen. Så spåras jordfel matning för matning.</a:t>
+              <a:rPr sz="1550" b="0">
+                <a:solidFill>
+                  <a:srgbClr val="111111"/>
+                </a:solidFill>
+                <a:latin typeface="Calibri"/>
+                <a:ea typeface="Calibri"/>
+                <a:cs typeface="Calibri"/>
+              </a:rPr>
+              <a:t>Differensström: alla aktiva ledare genom tången, faserna och N om den finns, men inte PE.</a:t>
             </a:r>
           </a:p>
           <a:p xmlns:a="http://schemas.openxmlformats.org/drawingml/2006/main">
@@ -16241,15 +16245,15 @@
               </a:defRPr>
             </a:pPr>
             <a:r>
-              <a:rPr sz="1700" b="0">
-                <a:solidFill>
-                  <a:srgbClr val="111111"/>
-                </a:solidFill>
-                <a:latin typeface="Calibri"/>
-                <a:ea typeface="Calibri"/>
-                <a:cs typeface="Calibri"/>
-              </a:rPr>
-              <a:t>Vid frekvensomriktare: true RMS och mätning på nätsidan.</a:t>
+              <a:rPr sz="1550" b="0">
+                <a:solidFill>
+                  <a:srgbClr val="111111"/>
+                </a:solidFill>
+                <a:latin typeface="Calibri"/>
+                <a:ea typeface="Calibri"/>
+                <a:cs typeface="Calibri"/>
+              </a:rPr>
+              <a:t>Använd en läckströmstång för mA-området. Vid omriktare: true RMS, mät på nätsidan.</a:t>
             </a:r>
           </a:p>
         </p:txBody>
@@ -16314,7 +16318,7 @@
       </p:sp>
       <p:pic xmlns:a="http://schemas.openxmlformats.org/drawingml/2006/main" xmlns:r="http://schemas.openxmlformats.org/officeDocument/2006/relationships">
         <p:nvPicPr>
-          <p:cNvPr id="9" name="Figur: Strömtång runt en ledare visar lastström" descr="Strömtång runt en ledare visar lastströmmen; runt fram- och returledaren motverkar bidragen varandra"/>
+          <p:cNvPr id="9" name="Figur: Strömtång runt en ledare visar lastström" descr="Strömtång runt en ledare visar lastströmmen, runt fram- och returledaren nästan noll, och runt L1–L3 och N men inte PE differensströmmen (läckströmmen)"/>
           <p:cNvPicPr>
             <a:picLocks noChangeAspect="1"/>
           </p:cNvPicPr>
@@ -16329,7 +16333,7 @@
         <p:spPr>
           <a:xfrm>
             <a:off x="4892040" y="1645920"/>
-            <a:ext cx="3886200" cy="2709112"/>
+            <a:ext cx="3886200" cy="2799657"/>
           </a:xfrm>
           <a:prstGeom prst="rect">
             <a:avLst/>
@@ -16625,7 +16629,7 @@
               </a:defRPr>
             </a:pPr>
             <a:r>
-              <a:rPr sz="1650" b="0">
+              <a:rPr sz="1550" b="0">
                 <a:solidFill>
                   <a:srgbClr val="111111"/>
                 </a:solidFill>
@@ -16649,15 +16653,15 @@
               </a:defRPr>
             </a:pPr>
             <a:r>
-              <a:rPr sz="1650" b="0">
-                <a:solidFill>
-                  <a:srgbClr val="111111"/>
-                </a:solidFill>
-                <a:latin typeface="Calibri"/>
-                <a:ea typeface="Calibri"/>
-                <a:cs typeface="Calibri"/>
-              </a:rPr>
-              <a:t>Normalt 500 V DC för 440 V-nät. Urladda till jord efter provningen.</a:t>
+              <a:rPr sz="1550" b="0">
+                <a:solidFill>
+                  <a:srgbClr val="111111"/>
+                </a:solidFill>
+                <a:latin typeface="Calibri"/>
+                <a:ea typeface="Calibri"/>
+                <a:cs typeface="Calibri"/>
+              </a:rPr>
+              <a:t>Provspänning enligt utrustningens anvisning, för 440 V-utrustning ofta 500 V DC. Urladda till jord efteråt.</a:t>
             </a:r>
           </a:p>
         </p:txBody>

--- a/sjoskolan/vecka-44/aktuell/v44_03_Fordjupad_matteknik_elev.pptx
+++ b/sjoskolan/vecka-44/aktuell/v44_03_Fordjupad_matteknik_elev.pptx
@@ -3903,7 +3903,7 @@
                 <a:ea typeface="Calibri"/>
                 <a:cs typeface="Calibri"/>
               </a:rPr>
-              <a:t>Lika ström fram och tillbaka har motsatt magnetisk riktning när båda ledarna omsluts.</a:t>
+              <a:t>Strömmarna fram och tillbaka går åt olika håll, så deras magnetfält tar ut varandra när tången omsluter båda ledarna.</a:t>
             </a:r>
           </a:p>
         </p:txBody>
@@ -3960,7 +3960,7 @@
                 <a:ea typeface="Calibri"/>
                 <a:cs typeface="Calibri"/>
               </a:rPr>
-              <a:t>Förutsättningar: 10 A ut och 10 A tillbaka. Ingen ström tar annan väg. Ideal tång som passar signaltypen.</a:t>
+              <a:t>Förutsättningar: 10 A ut och 10 A tillbaka. Ingen ström tar någon annan väg. Tången är ideal och passar för strömmen.</a:t>
             </a:r>
           </a:p>
         </p:txBody>
@@ -4017,7 +4017,7 @@
                 <a:ea typeface="Calibri"/>
                 <a:cs typeface="Calibri"/>
               </a:rPr>
-              <a:t>Arbetsgång: Summera strömmarnas bidrag med riktning. Jämför med mätning runt endast en ledare.</a:t>
+              <a:t>Arbetsgång: Lägg ihop strömmarna med tecken och jämför med en mätning runt bara en ledare.</a:t>
             </a:r>
           </a:p>
         </p:txBody>
@@ -4294,7 +4294,7 @@
                 <a:ea typeface="Calibri"/>
                 <a:cs typeface="Calibri"/>
               </a:rPr>
-              <a:t>Lasten tar 10 A. Tången omsluter både fram- och returledaren. Vad visar en ideal tång om ingen ström tar annan väg?</a:t>
+              <a:t>Lasten tar 10 A. Tången omsluter både fram- och returledaren. Vad visar en ideal tång om ingen ström tar någon annan väg?</a:t>
             </a:r>
           </a:p>
         </p:txBody>
@@ -4570,40 +4570,7 @@
                 <a:ea typeface="Calibri"/>
                 <a:cs typeface="Calibri"/>
               </a:rPr>
-              <a:t>I = </a:t>
-            </a:r>
-            <a:r>
-              <a:rPr sz="2400" b="1">
-                <a:solidFill>
-                  <a:srgbClr val="064F91"/>
-                </a:solidFill>
-                <a:latin typeface="Calibri"/>
-                <a:ea typeface="Calibri"/>
-                <a:cs typeface="Calibri"/>
-              </a:rPr>
-              <a:t>U</a:t>
-            </a:r>
-            <a:r>
-              <a:rPr sz="2400" b="1" baseline="-25000">
-                <a:solidFill>
-                  <a:srgbClr val="064F91"/>
-                </a:solidFill>
-                <a:latin typeface="Calibri"/>
-                <a:ea typeface="Calibri"/>
-                <a:cs typeface="Calibri"/>
-              </a:rPr>
-              <a:t>tång</a:t>
-            </a:r>
-            <a:r>
-              <a:rPr sz="2400" b="1">
-                <a:solidFill>
-                  <a:srgbClr val="064F91"/>
-                </a:solidFill>
-                <a:latin typeface="Calibri"/>
-                <a:ea typeface="Calibri"/>
-                <a:cs typeface="Calibri"/>
-              </a:rPr>
-              <a:t>/k</a:t>
+              <a:t>I = Utång/k</a:t>
             </a:r>
           </a:p>
         </p:txBody>
@@ -4660,40 +4627,7 @@
                 <a:ea typeface="Calibri"/>
                 <a:cs typeface="Calibri"/>
               </a:rPr>
-              <a:t>k är tångens känslighet i mV/A. </a:t>
-            </a:r>
-            <a:r>
-              <a:rPr sz="2100" b="0">
-                <a:solidFill>
-                  <a:srgbClr val="111111"/>
-                </a:solidFill>
-                <a:latin typeface="Calibri"/>
-                <a:ea typeface="Calibri"/>
-                <a:cs typeface="Calibri"/>
-              </a:rPr>
-              <a:t>U</a:t>
-            </a:r>
-            <a:r>
-              <a:rPr sz="2100" b="0" baseline="-25000">
-                <a:solidFill>
-                  <a:srgbClr val="111111"/>
-                </a:solidFill>
-                <a:latin typeface="Calibri"/>
-                <a:ea typeface="Calibri"/>
-                <a:cs typeface="Calibri"/>
-              </a:rPr>
-              <a:t>tång</a:t>
-            </a:r>
-            <a:r>
-              <a:rPr sz="2100" b="0">
-                <a:solidFill>
-                  <a:srgbClr val="111111"/>
-                </a:solidFill>
-                <a:latin typeface="Calibri"/>
-                <a:ea typeface="Calibri"/>
-                <a:cs typeface="Calibri"/>
-              </a:rPr>
-              <a:t> är dess utspänning i mV. mV dividerat med mV/A ger A.</a:t>
+              <a:t>k är tångens känslighet i mV/A och Utång dess utspänning i mV.</a:t>
             </a:r>
           </a:p>
         </p:txBody>
@@ -4750,7 +4684,7 @@
                 <a:ea typeface="Calibri"/>
                 <a:cs typeface="Calibri"/>
               </a:rPr>
-              <a:t>Förutsättningar: Känslighet 10 mV/A och visning 250 mV. Nollfel och andra instrumentfel försummas.</a:t>
+              <a:t>Förutsättningar: Känslighet 10 mV/A och visning 250 mV. Bortse från nollfel och andra instrumentfel.</a:t>
             </a:r>
           </a:p>
         </p:txBody>
@@ -4807,7 +4741,7 @@
                 <a:ea typeface="Calibri"/>
                 <a:cs typeface="Calibri"/>
               </a:rPr>
-              <a:t>Arbetsgång: Dividera visningen med känsligheten. Behåll mV på båda sidor av kvoten.</a:t>
+              <a:t>Arbetsgång: Dela visningen med känsligheten – mV delat med mV/A ger A.</a:t>
             </a:r>
           </a:p>
         </p:txBody>
@@ -5360,62 +5294,7 @@
                 <a:ea typeface="Calibri"/>
                 <a:cs typeface="Calibri"/>
               </a:rPr>
-              <a:t>R = </a:t>
-            </a:r>
-            <a:r>
-              <a:rPr sz="2400" b="1">
-                <a:solidFill>
-                  <a:srgbClr val="064F91"/>
-                </a:solidFill>
-                <a:latin typeface="Calibri"/>
-                <a:ea typeface="Calibri"/>
-                <a:cs typeface="Calibri"/>
-              </a:rPr>
-              <a:t>U</a:t>
-            </a:r>
-            <a:r>
-              <a:rPr sz="2400" b="1" baseline="-25000">
-                <a:solidFill>
-                  <a:srgbClr val="064F91"/>
-                </a:solidFill>
-                <a:latin typeface="Calibri"/>
-                <a:ea typeface="Calibri"/>
-                <a:cs typeface="Calibri"/>
-              </a:rPr>
-              <a:t>prov</a:t>
-            </a:r>
-            <a:r>
-              <a:rPr sz="2400" b="1">
-                <a:solidFill>
-                  <a:srgbClr val="064F91"/>
-                </a:solidFill>
-                <a:latin typeface="Calibri"/>
-                <a:ea typeface="Calibri"/>
-                <a:cs typeface="Calibri"/>
-              </a:rPr>
-              <a:t>/</a:t>
-            </a:r>
-            <a:r>
-              <a:rPr sz="2400" b="1">
-                <a:solidFill>
-                  <a:srgbClr val="064F91"/>
-                </a:solidFill>
-                <a:latin typeface="Calibri"/>
-                <a:ea typeface="Calibri"/>
-                <a:cs typeface="Calibri"/>
-              </a:rPr>
-              <a:t>I</a:t>
-            </a:r>
-            <a:r>
-              <a:rPr sz="2400" b="1" baseline="-25000">
-                <a:solidFill>
-                  <a:srgbClr val="064F91"/>
-                </a:solidFill>
-                <a:latin typeface="Calibri"/>
-                <a:ea typeface="Calibri"/>
-                <a:cs typeface="Calibri"/>
-              </a:rPr>
-              <a:t>läck</a:t>
+              <a:t>R = Uprov/Iläck</a:t>
             </a:r>
           </a:p>
         </p:txBody>
@@ -5472,62 +5351,7 @@
                 <a:ea typeface="Calibri"/>
                 <a:cs typeface="Calibri"/>
               </a:rPr>
-              <a:t>U</a:t>
-            </a:r>
-            <a:r>
-              <a:rPr sz="2100" b="0" baseline="-25000">
-                <a:solidFill>
-                  <a:srgbClr val="111111"/>
-                </a:solidFill>
-                <a:latin typeface="Calibri"/>
-                <a:ea typeface="Calibri"/>
-                <a:cs typeface="Calibri"/>
-              </a:rPr>
-              <a:t>prov</a:t>
-            </a:r>
-            <a:r>
-              <a:rPr sz="2100" b="0">
-                <a:solidFill>
-                  <a:srgbClr val="111111"/>
-                </a:solidFill>
-                <a:latin typeface="Calibri"/>
-                <a:ea typeface="Calibri"/>
-                <a:cs typeface="Calibri"/>
-              </a:rPr>
-              <a:t> anges i V, </a:t>
-            </a:r>
-            <a:r>
-              <a:rPr sz="2100" b="0">
-                <a:solidFill>
-                  <a:srgbClr val="111111"/>
-                </a:solidFill>
-                <a:latin typeface="Calibri"/>
-                <a:ea typeface="Calibri"/>
-                <a:cs typeface="Calibri"/>
-              </a:rPr>
-              <a:t>I</a:t>
-            </a:r>
-            <a:r>
-              <a:rPr sz="2100" b="0" baseline="-25000">
-                <a:solidFill>
-                  <a:srgbClr val="111111"/>
-                </a:solidFill>
-                <a:latin typeface="Calibri"/>
-                <a:ea typeface="Calibri"/>
-                <a:cs typeface="Calibri"/>
-              </a:rPr>
-              <a:t>läck</a:t>
-            </a:r>
-            <a:r>
-              <a:rPr sz="2100" b="0">
-                <a:solidFill>
-                  <a:srgbClr val="111111"/>
-                </a:solidFill>
-                <a:latin typeface="Calibri"/>
-                <a:ea typeface="Calibri"/>
-                <a:cs typeface="Calibri"/>
-              </a:rPr>
-              <a:t> i A och R i Ω. 1 mA = 0,001 A. 1 MΩ = 1 000 000 Ω.</a:t>
+              <a:t>1 mA = 0,001 A och 1 MΩ = 1 000 000 Ω.</a:t>
             </a:r>
           </a:p>
         </p:txBody>
@@ -5584,7 +5408,7 @@
                 <a:ea typeface="Calibri"/>
                 <a:cs typeface="Calibri"/>
               </a:rPr>
-              <a:t>Förutsättningar: Förenklad stationär resistiv modell: 500 V och 0,25 mA. Uppgiften innebär ingen praktisk provning.</a:t>
+              <a:t>Förutsättningar: Isolationen räknas som en ren resistans: 500 V och 0,25 mA. Uppgiften är bara en beräkning.</a:t>
             </a:r>
           </a:p>
         </p:txBody>
@@ -5641,7 +5465,7 @@
                 <a:ea typeface="Calibri"/>
                 <a:cs typeface="Calibri"/>
               </a:rPr>
-              <a:t>Arbetsgång: Omvandla läckströmmen till A. Dividera och omvandla sedan Ω till MΩ.</a:t>
+              <a:t>Arbetsgång: Gör om läckströmmen till A, dela spänningen med strömmen och gör om svaret till MΩ.</a:t>
             </a:r>
           </a:p>
         </p:txBody>
@@ -5918,7 +5742,7 @@
                 <a:ea typeface="Calibri"/>
                 <a:cs typeface="Calibri"/>
               </a:rPr>
-              <a:t>En förenklad isolationsmodell har 500 V provspänning och 0,25 mA stationär läckström. Beräkna resistansen.</a:t>
+              <a:t>Ett isolationsprov med 500 V ger en stabil läckström på 0,25 mA. Beräkna isolationsresistansen.</a:t>
             </a:r>
           </a:p>
         </p:txBody>
@@ -6194,7 +6018,117 @@
                 <a:ea typeface="Calibri"/>
                 <a:cs typeface="Calibri"/>
               </a:rPr>
-              <a:t>Rp = R₁R₂/(R₁ + R₂)</a:t>
+              <a:t>R</a:t>
+            </a:r>
+            <a:r>
+              <a:rPr sz="2400" b="1" baseline="-25000">
+                <a:solidFill>
+                  <a:srgbClr val="064F91"/>
+                </a:solidFill>
+                <a:latin typeface="Calibri"/>
+                <a:ea typeface="Calibri"/>
+                <a:cs typeface="Calibri"/>
+              </a:rPr>
+              <a:t>p</a:t>
+            </a:r>
+            <a:r>
+              <a:rPr sz="2400" b="1">
+                <a:solidFill>
+                  <a:srgbClr val="064F91"/>
+                </a:solidFill>
+                <a:latin typeface="Calibri"/>
+                <a:ea typeface="Calibri"/>
+                <a:cs typeface="Calibri"/>
+              </a:rPr>
+              <a:t> = R</a:t>
+            </a:r>
+            <a:r>
+              <a:rPr sz="2400" b="1" baseline="-25000">
+                <a:solidFill>
+                  <a:srgbClr val="064F91"/>
+                </a:solidFill>
+                <a:latin typeface="Calibri"/>
+                <a:ea typeface="Calibri"/>
+                <a:cs typeface="Calibri"/>
+              </a:rPr>
+              <a:t>1</a:t>
+            </a:r>
+            <a:r>
+              <a:rPr sz="2400" b="1">
+                <a:solidFill>
+                  <a:srgbClr val="064F91"/>
+                </a:solidFill>
+                <a:latin typeface="Calibri"/>
+                <a:ea typeface="Calibri"/>
+                <a:cs typeface="Calibri"/>
+              </a:rPr>
+              <a:t> · R</a:t>
+            </a:r>
+            <a:r>
+              <a:rPr sz="2400" b="1" baseline="-25000">
+                <a:solidFill>
+                  <a:srgbClr val="064F91"/>
+                </a:solidFill>
+                <a:latin typeface="Calibri"/>
+                <a:ea typeface="Calibri"/>
+                <a:cs typeface="Calibri"/>
+              </a:rPr>
+              <a:t>2</a:t>
+            </a:r>
+            <a:r>
+              <a:rPr sz="2400" b="1">
+                <a:solidFill>
+                  <a:srgbClr val="064F91"/>
+                </a:solidFill>
+                <a:latin typeface="Calibri"/>
+                <a:ea typeface="Calibri"/>
+                <a:cs typeface="Calibri"/>
+              </a:rPr>
+              <a:t>/(R</a:t>
+            </a:r>
+            <a:r>
+              <a:rPr sz="2400" b="1" baseline="-25000">
+                <a:solidFill>
+                  <a:srgbClr val="064F91"/>
+                </a:solidFill>
+                <a:latin typeface="Calibri"/>
+                <a:ea typeface="Calibri"/>
+                <a:cs typeface="Calibri"/>
+              </a:rPr>
+              <a:t>1</a:t>
+            </a:r>
+            <a:r>
+              <a:rPr sz="2400" b="1">
+                <a:solidFill>
+                  <a:srgbClr val="064F91"/>
+                </a:solidFill>
+                <a:latin typeface="Calibri"/>
+                <a:ea typeface="Calibri"/>
+                <a:cs typeface="Calibri"/>
+              </a:rPr>
+              <a:t> + R</a:t>
+            </a:r>
+            <a:r>
+              <a:rPr sz="2400" b="1" baseline="-25000">
+                <a:solidFill>
+                  <a:srgbClr val="064F91"/>
+                </a:solidFill>
+                <a:latin typeface="Calibri"/>
+                <a:ea typeface="Calibri"/>
+                <a:cs typeface="Calibri"/>
+              </a:rPr>
+              <a:t>2</a:t>
+            </a:r>
+            <a:r>
+              <a:rPr sz="2400" b="1">
+                <a:solidFill>
+                  <a:srgbClr val="064F91"/>
+                </a:solidFill>
+                <a:latin typeface="Calibri"/>
+                <a:ea typeface="Calibri"/>
+                <a:cs typeface="Calibri"/>
+              </a:rPr>
+              <a:t>)</a:t>
             </a:r>
           </a:p>
         </p:txBody>
@@ -6251,7 +6185,7 @@
                 <a:ea typeface="Calibri"/>
                 <a:cs typeface="Calibri"/>
               </a:rPr>
-              <a:t>Två parallella isolationsvägar leder tillsammans större läckström än en ensam väg vid samma spänning.</a:t>
+              <a:t>Två parallella vägar släpper tillsammans igenom mer läckström än en ensam.</a:t>
             </a:r>
           </a:p>
         </p:txBody>
@@ -6308,7 +6242,51 @@
                 <a:ea typeface="Calibri"/>
                 <a:cs typeface="Calibri"/>
               </a:rPr>
-              <a:t>Förutsättningar: R₁ = R₂ = 20 MΩ. Båda vägarna ligger mellan samma aktiva nod och jord.</a:t>
+              <a:t>Förutsättningar: R</a:t>
+            </a:r>
+            <a:r>
+              <a:rPr sz="2025" b="0" baseline="-25000">
+                <a:solidFill>
+                  <a:srgbClr val="111111"/>
+                </a:solidFill>
+                <a:latin typeface="Calibri"/>
+                <a:ea typeface="Calibri"/>
+                <a:cs typeface="Calibri"/>
+              </a:rPr>
+              <a:t>1</a:t>
+            </a:r>
+            <a:r>
+              <a:rPr sz="2025" b="0">
+                <a:solidFill>
+                  <a:srgbClr val="111111"/>
+                </a:solidFill>
+                <a:latin typeface="Calibri"/>
+                <a:ea typeface="Calibri"/>
+                <a:cs typeface="Calibri"/>
+              </a:rPr>
+              <a:t> = R</a:t>
+            </a:r>
+            <a:r>
+              <a:rPr sz="2025" b="0" baseline="-25000">
+                <a:solidFill>
+                  <a:srgbClr val="111111"/>
+                </a:solidFill>
+                <a:latin typeface="Calibri"/>
+                <a:ea typeface="Calibri"/>
+                <a:cs typeface="Calibri"/>
+              </a:rPr>
+              <a:t>2</a:t>
+            </a:r>
+            <a:r>
+              <a:rPr sz="2025" b="0">
+                <a:solidFill>
+                  <a:srgbClr val="111111"/>
+                </a:solidFill>
+                <a:latin typeface="Calibri"/>
+                <a:ea typeface="Calibri"/>
+                <a:cs typeface="Calibri"/>
+              </a:rPr>
+              <a:t> = 20 MΩ. Båda vägarna går mellan samma ledare och jord.</a:t>
             </a:r>
           </a:p>
         </p:txBody>
@@ -6365,7 +6343,7 @@
                 <a:ea typeface="Calibri"/>
                 <a:cs typeface="Calibri"/>
               </a:rPr>
-              <a:t>Arbetsgång: Använd parallellformeln med MΩ genom hela beräkningen.</a:t>
+              <a:t>Arbetsgång: Använd parallellformeln och räkna i MΩ hela vägen.</a:t>
             </a:r>
           </a:p>
         </p:txBody>
@@ -6642,7 +6620,7 @@
                 <a:ea typeface="Calibri"/>
                 <a:cs typeface="Calibri"/>
               </a:rPr>
-              <a:t>Två oberoende isolationsvägar på 20 MΩ och 20 MΩ ligger parallellt mot jord. Beräkna ekvivalent resistans.</a:t>
+              <a:t>Två isolationsvägar på 20 MΩ vardera går parallellt från samma ledare till jord. Beräkna den sammanlagda resistansen.</a:t>
             </a:r>
           </a:p>
         </p:txBody>
@@ -6999,7 +6977,7 @@
                 <a:ea typeface="Calibri"/>
                 <a:cs typeface="Calibri"/>
               </a:rPr>
-              <a:t>U är mätspänning i V och I provström i A. Enheten V/A är Ω.</a:t>
+              <a:t>V/A ger Ω.</a:t>
             </a:r>
           </a:p>
         </p:txBody>
@@ -7056,7 +7034,7 @@
                 <a:ea typeface="Calibri"/>
                 <a:cs typeface="Calibri"/>
               </a:rPr>
-              <a:t>Förutsättningar: Mätmodell med 0,40 V och 20 mA. Övriga bidrag försummas i räkningen.</a:t>
+              <a:t>Förutsättningar: 0,40 V och 20 mA. Andra bidrag försummas.</a:t>
             </a:r>
           </a:p>
         </p:txBody>
@@ -7113,7 +7091,7 @@
                 <a:ea typeface="Calibri"/>
                 <a:cs typeface="Calibri"/>
               </a:rPr>
-              <a:t>Arbetsgång: Omvandla mA till A innan du dividerar.</a:t>
+              <a:t>Arbetsgång: Gör om mA till A innan du delar.</a:t>
             </a:r>
           </a:p>
         </p:txBody>
@@ -7390,7 +7368,7 @@
                 <a:ea typeface="Calibri"/>
                 <a:cs typeface="Calibri"/>
               </a:rPr>
-              <a:t>En kontrollerad mätmodell ger 0,40 V vid provström 20 mA. Beräkna R.</a:t>
+              <a:t>En jordtagsmätning ger 0,40 V vid provströmmen 20 mA. Beräkna R.</a:t>
             </a:r>
           </a:p>
         </p:txBody>
@@ -10113,7 +10091,7 @@
                 <a:ea typeface="Calibri"/>
                 <a:cs typeface="Calibri"/>
               </a:rPr>
-              <a:t>T = antal rutor · tid/ruta     f = 1/T</a:t>
+              <a:t>T = antal rutor · tid/ruta; f = 1/T</a:t>
             </a:r>
           </a:p>
         </p:txBody>
@@ -10170,7 +10148,7 @@
                 <a:ea typeface="Calibri"/>
                 <a:cs typeface="Calibri"/>
               </a:rPr>
-              <a:t>T ska uttryckas i s när frekvensen beräknas i Hz. 1 ms = 0,001 s.</a:t>
+              <a:t>T måste vara i sekunder för att f ska bli i Hz. 1 ms = 0,001 s.</a:t>
             </a:r>
           </a:p>
         </p:txBody>
@@ -10227,7 +10205,7 @@
                 <a:ea typeface="Calibri"/>
                 <a:cs typeface="Calibri"/>
               </a:rPr>
-              <a:t>Förutsättningar: En hel period upptar 4 rutor. Tidsbasen är 5 ms per ruta.</a:t>
+              <a:t>Förutsättningar: En hel period tar 4 rutor. Tidsbasen är 5 ms per ruta.</a:t>
             </a:r>
           </a:p>
         </p:txBody>
@@ -10284,7 +10262,7 @@
                 <a:ea typeface="Calibri"/>
                 <a:cs typeface="Calibri"/>
               </a:rPr>
-              <a:t>Arbetsgång: Beräkna perioden i ms, omvandla till s och ta sedan inversen.</a:t>
+              <a:t>Arbetsgång: Räkna ut periodtiden i ms, gör om till s och dela sedan 1 med den.</a:t>
             </a:r>
           </a:p>
         </p:txBody>
@@ -10561,7 +10539,7 @@
                 <a:ea typeface="Calibri"/>
                 <a:cs typeface="Calibri"/>
               </a:rPr>
-              <a:t>En period täcker fyra rutor. Tidsbasen är 5 ms/ruta. Beräkna period och frekvens.</a:t>
+              <a:t>En period tar fyra rutor, och tidsbasen är 5 ms per ruta. Beräkna periodtid och frekvens.</a:t>
             </a:r>
           </a:p>
         </p:txBody>
@@ -10861,51 +10839,7 @@
                 <a:ea typeface="Calibri"/>
                 <a:cs typeface="Calibri"/>
               </a:rPr>
-              <a:t>û</a:t>
-            </a:r>
-            <a:r>
-              <a:rPr sz="2400" b="1" baseline="-25000">
-                <a:solidFill>
-                  <a:srgbClr val="064F91"/>
-                </a:solidFill>
-                <a:latin typeface="Calibri"/>
-                <a:ea typeface="Calibri"/>
-                <a:cs typeface="Calibri"/>
-              </a:rPr>
-              <a:t>verklig</a:t>
-            </a:r>
-            <a:r>
-              <a:rPr sz="2400" b="1">
-                <a:solidFill>
-                  <a:srgbClr val="064F91"/>
-                </a:solidFill>
-                <a:latin typeface="Calibri"/>
-                <a:ea typeface="Calibri"/>
-                <a:cs typeface="Calibri"/>
-              </a:rPr>
-              <a:t> = probfaktor · </a:t>
-            </a:r>
-            <a:r>
-              <a:rPr sz="2400" b="1">
-                <a:solidFill>
-                  <a:srgbClr val="064F91"/>
-                </a:solidFill>
-                <a:latin typeface="Calibri"/>
-                <a:ea typeface="Calibri"/>
-                <a:cs typeface="Calibri"/>
-              </a:rPr>
-              <a:t>û</a:t>
-            </a:r>
-            <a:r>
-              <a:rPr sz="2400" b="1" baseline="-25000">
-                <a:solidFill>
-                  <a:srgbClr val="064F91"/>
-                </a:solidFill>
-                <a:latin typeface="Calibri"/>
-                <a:ea typeface="Calibri"/>
-                <a:cs typeface="Calibri"/>
-              </a:rPr>
-              <a:t>visad</a:t>
+              <a:t>ûverklig = probfaktor · ûvisad</a:t>
             </a:r>
           </a:p>
         </p:txBody>
@@ -10962,7 +10896,7 @@
                 <a:ea typeface="Calibri"/>
                 <a:cs typeface="Calibri"/>
               </a:rPr>
-              <a:t>En 10:1-prob dämpar spänningen till en tiondel före instrumentets ingång.</a:t>
+              <a:t>En 10:1-prob dämpar spänningen till en tiondel innan den når oscilloskopet.</a:t>
             </a:r>
           </a:p>
         </p:txBody>
@@ -11019,7 +10953,7 @@
                 <a:ea typeface="Calibri"/>
                 <a:cs typeface="Calibri"/>
               </a:rPr>
-              <a:t>Förutsättningar: Probfaktor 10, visad topp 2,0 V. Automatisk probkompensation är uttryckligen avstängd.</a:t>
+              <a:t>Förutsättningar: Probfaktor 10, visat toppvärde 2,0 V. Den automatiska omräkningen är avstängd.</a:t>
             </a:r>
           </a:p>
         </p:txBody>
@@ -11076,7 +11010,7 @@
                 <a:ea typeface="Calibri"/>
                 <a:cs typeface="Calibri"/>
               </a:rPr>
-              <a:t>Arbetsgång: Multiplicera en gång med 10. Med aktiv automatisk kompensation får faktorn inte räknas två gånger.</a:t>
+              <a:t>Arbetsgång: Multiplicera en gång med 10. Om oscilloskopet redan räknar om automatiskt får du inte multiplicera igen.</a:t>
             </a:r>
           </a:p>
         </p:txBody>
@@ -11353,7 +11287,7 @@
                 <a:ea typeface="Calibri"/>
                 <a:cs typeface="Calibri"/>
               </a:rPr>
-              <a:t>En 10:1-prob används. Skärmen visar 2,0 V topp utan automatisk probkompensation. Bestäm signalens toppvärde.</a:t>
+              <a:t>En prob med dämpningen 10:1 används. Skärmen visar toppvärdet 2,0 V, och oscilloskopet räknar inte om automatiskt. Bestäm signalens verkliga toppvärde.</a:t>
             </a:r>
           </a:p>
         </p:txBody>
@@ -11709,7 +11643,7 @@
                 <a:ea typeface="Calibri"/>
                 <a:cs typeface="Calibri"/>
               </a:rPr>
-              <a:t>a är procenttal, n antal siffror, steg upplösning och δ den summerade felgränsens belopp.</a:t>
+              <a:t>a är procenttalet, n antalet siffror, steg upplösningen och δ den totala felgränsen.</a:t>
             </a:r>
           </a:p>
         </p:txBody>
@@ -11766,7 +11700,7 @@
                 <a:ea typeface="Calibri"/>
                 <a:cs typeface="Calibri"/>
               </a:rPr>
-              <a:t>Förutsättningar: Visning 100,0 V, a = 0,5, n = 2 och steg = 0,1 V.</a:t>
+              <a:t>Förutsättningar: Visat värde 100,0 V, a = 0,5, n = 2 och steg = 0,1 V.</a:t>
             </a:r>
           </a:p>
         </p:txBody>
@@ -11823,7 +11757,7 @@
                 <a:ea typeface="Calibri"/>
                 <a:cs typeface="Calibri"/>
               </a:rPr>
-              <a:t>Arbetsgång: Räkna de två bidragen var för sig. Summera dem och beräkna båda intervallgränserna.</a:t>
+              <a:t>Arbetsgång: Räkna de två delarna var för sig, lägg ihop dem och räkna ut intervallets båda gränser.</a:t>
             </a:r>
           </a:p>
         </p:txBody>
@@ -12614,7 +12548,7 @@
                 <a:ea typeface="Calibri"/>
                 <a:cs typeface="Calibri"/>
               </a:rPr>
-              <a:t>Visning 100,0 V, specifikation ±(0,5 % + 2 siffror), upplösning 0,1 V. Beräkna gräns och intervall.</a:t>
+              <a:t>Instrumentet visar 100,0 V. Specifikationen är ±(0,5 % + 2 siffror) och upplösningen 0,1 V. Beräkna felgränsen och intervallet.</a:t>
             </a:r>
           </a:p>
         </p:txBody>
@@ -12890,7 +12824,73 @@
                 <a:ea typeface="Calibri"/>
                 <a:cs typeface="Calibri"/>
               </a:rPr>
-              <a:t>Medel = (x₁ + x₂ + x₃)/3</a:t>
+              <a:t>Medel = (x</a:t>
+            </a:r>
+            <a:r>
+              <a:rPr sz="2400" b="1" baseline="-25000">
+                <a:solidFill>
+                  <a:srgbClr val="064F91"/>
+                </a:solidFill>
+                <a:latin typeface="Calibri"/>
+                <a:ea typeface="Calibri"/>
+                <a:cs typeface="Calibri"/>
+              </a:rPr>
+              <a:t>1</a:t>
+            </a:r>
+            <a:r>
+              <a:rPr sz="2400" b="1">
+                <a:solidFill>
+                  <a:srgbClr val="064F91"/>
+                </a:solidFill>
+                <a:latin typeface="Calibri"/>
+                <a:ea typeface="Calibri"/>
+                <a:cs typeface="Calibri"/>
+              </a:rPr>
+              <a:t> + x</a:t>
+            </a:r>
+            <a:r>
+              <a:rPr sz="2400" b="1" baseline="-25000">
+                <a:solidFill>
+                  <a:srgbClr val="064F91"/>
+                </a:solidFill>
+                <a:latin typeface="Calibri"/>
+                <a:ea typeface="Calibri"/>
+                <a:cs typeface="Calibri"/>
+              </a:rPr>
+              <a:t>2</a:t>
+            </a:r>
+            <a:r>
+              <a:rPr sz="2400" b="1">
+                <a:solidFill>
+                  <a:srgbClr val="064F91"/>
+                </a:solidFill>
+                <a:latin typeface="Calibri"/>
+                <a:ea typeface="Calibri"/>
+                <a:cs typeface="Calibri"/>
+              </a:rPr>
+              <a:t> + x</a:t>
+            </a:r>
+            <a:r>
+              <a:rPr sz="2400" b="1" baseline="-25000">
+                <a:solidFill>
+                  <a:srgbClr val="064F91"/>
+                </a:solidFill>
+                <a:latin typeface="Calibri"/>
+                <a:ea typeface="Calibri"/>
+                <a:cs typeface="Calibri"/>
+              </a:rPr>
+              <a:t>3</a:t>
+            </a:r>
+            <a:r>
+              <a:rPr sz="2400" b="1">
+                <a:solidFill>
+                  <a:srgbClr val="064F91"/>
+                </a:solidFill>
+                <a:latin typeface="Calibri"/>
+                <a:ea typeface="Calibri"/>
+                <a:cs typeface="Calibri"/>
+              </a:rPr>
+              <a:t>)/3</a:t>
             </a:r>
           </a:p>
           <a:p xmlns:a="http://schemas.openxmlformats.org/drawingml/2006/main">
@@ -12913,62 +12913,7 @@
                 <a:ea typeface="Calibri"/>
                 <a:cs typeface="Calibri"/>
               </a:rPr>
-              <a:t>Variationsbredd = </a:t>
-            </a:r>
-            <a:r>
-              <a:rPr sz="2400" b="1">
-                <a:solidFill>
-                  <a:srgbClr val="064F91"/>
-                </a:solidFill>
-                <a:latin typeface="Calibri"/>
-                <a:ea typeface="Calibri"/>
-                <a:cs typeface="Calibri"/>
-              </a:rPr>
-              <a:t>x</a:t>
-            </a:r>
-            <a:r>
-              <a:rPr sz="2400" b="1" baseline="-25000">
-                <a:solidFill>
-                  <a:srgbClr val="064F91"/>
-                </a:solidFill>
-                <a:latin typeface="Calibri"/>
-                <a:ea typeface="Calibri"/>
-                <a:cs typeface="Calibri"/>
-              </a:rPr>
-              <a:t>max</a:t>
-            </a:r>
-            <a:r>
-              <a:rPr sz="2400" b="1">
-                <a:solidFill>
-                  <a:srgbClr val="064F91"/>
-                </a:solidFill>
-                <a:latin typeface="Calibri"/>
-                <a:ea typeface="Calibri"/>
-                <a:cs typeface="Calibri"/>
-              </a:rPr>
-              <a:t> − </a:t>
-            </a:r>
-            <a:r>
-              <a:rPr sz="2400" b="1">
-                <a:solidFill>
-                  <a:srgbClr val="064F91"/>
-                </a:solidFill>
-                <a:latin typeface="Calibri"/>
-                <a:ea typeface="Calibri"/>
-                <a:cs typeface="Calibri"/>
-              </a:rPr>
-              <a:t>x</a:t>
-            </a:r>
-            <a:r>
-              <a:rPr sz="2400" b="1" baseline="-25000">
-                <a:solidFill>
-                  <a:srgbClr val="064F91"/>
-                </a:solidFill>
-                <a:latin typeface="Calibri"/>
-                <a:ea typeface="Calibri"/>
-                <a:cs typeface="Calibri"/>
-              </a:rPr>
-              <a:t>min</a:t>
+              <a:t>Variationsbredd = xmax − xmin</a:t>
             </a:r>
           </a:p>
         </p:txBody>
@@ -13025,7 +12970,7 @@
                 <a:ea typeface="Calibri"/>
                 <a:cs typeface="Calibri"/>
               </a:rPr>
-              <a:t>Medel beskriver centrum. Variationsbredd beskriver största minus minsta observerade värdet.</a:t>
+              <a:t>Medelvärdet visar var värdena ligger, och variationsbredden är största minus minsta värdet.</a:t>
             </a:r>
           </a:p>
         </p:txBody>
@@ -13082,7 +13027,7 @@
                 <a:ea typeface="Calibri"/>
                 <a:cs typeface="Calibri"/>
               </a:rPr>
-              <a:t>Förutsättningar: Givna värden 9,8, 10,0 och 10,2 V. Ingen sannolikhetsmodell efterfrågas.</a:t>
+              <a:t>Förutsättningar: Mätvärdena 9,8, 10,0 och 10,2 V. Ingen statistisk analys behövs.</a:t>
             </a:r>
           </a:p>
         </p:txBody>
@@ -13139,7 +13084,7 @@
                 <a:ea typeface="Calibri"/>
                 <a:cs typeface="Calibri"/>
               </a:rPr>
-              <a:t>Arbetsgång: Summera och dividera med tre. Beräkna därefter bredden som en separat storhet.</a:t>
+              <a:t>Arbetsgång: Lägg ihop värdena och dela med tre. Räkna sedan variationsbredden för sig.</a:t>
             </a:r>
           </a:p>
         </p:txBody>
@@ -13416,7 +13361,7 @@
                 <a:ea typeface="Calibri"/>
                 <a:cs typeface="Calibri"/>
               </a:rPr>
-              <a:t>Tre värden är 9,8, 10,0 och 10,2 V. Beräkna medelvärde och variationsbredd.</a:t>
+              <a:t>Tre mätningar ger 9,8, 10,0 och 10,2 V. Beräkna medelvärde och variationsbredd.</a:t>
             </a:r>
           </a:p>
         </p:txBody>
@@ -13749,7 +13694,7 @@
                 <a:ea typeface="Calibri"/>
                 <a:cs typeface="Calibri"/>
               </a:rPr>
-              <a:t>Provspänning, mättid, temperatur, fukt och inkopplad utrustning kan påverka isolationstalet.</a:t>
+              <a:t>Provspänning, mättid, temperatur, fukt och inkopplad utrustning påverkar värdet.</a:t>
             </a:r>
           </a:p>
         </p:txBody>
@@ -13806,7 +13751,7 @@
                 <a:ea typeface="Calibri"/>
                 <a:cs typeface="Calibri"/>
               </a:rPr>
-              <a:t>Förutsättningar: Värdet har ändrats från 100 till 10 MΩ, men mätvillkoren är inte redovisade.</a:t>
+              <a:t>Förutsättningar: Värdet har gått från 100 till 10 MΩ, men det står inget om under vilka förhållanden mätningarna gjordes.</a:t>
             </a:r>
           </a:p>
         </p:txBody>
@@ -13863,7 +13808,7 @@
                 <a:ea typeface="Calibri"/>
                 <a:cs typeface="Calibri"/>
               </a:rPr>
-              <a:t>Arbetsgång: Ange vilka villkor som ska jämföras före diagnos. Skilj observerad minskning från bevisad skada.</a:t>
+              <a:t>Arbetsgång: Ange vilka förhållanden som måste jämföras innan du drar en slutsats. Håll isär ett lägre mätvärde och en bevisad skada.</a:t>
             </a:r>
           </a:p>
         </p:txBody>

--- a/sjoskolan/vecka-44/aktuell/v44_03_Fordjupad_matteknik_elev.pptx
+++ b/sjoskolan/vecka-44/aktuell/v44_03_Fordjupad_matteknik_elev.pptx
@@ -3789,7 +3789,7 @@
                 <a:ea typeface="Calibri"/>
                 <a:cs typeface="Calibri"/>
               </a:rPr>
-              <a:t>Stöd till övning 1</a:t>
+              <a:t>Stöd till övning 3.1</a:t>
             </a:r>
           </a:p>
         </p:txBody>
@@ -4178,7 +4178,7 @@
                 <a:ea typeface="Calibri"/>
                 <a:cs typeface="Calibri"/>
               </a:rPr>
-              <a:t>Övning 1</a:t>
+              <a:t>Övning 3.1</a:t>
             </a:r>
           </a:p>
         </p:txBody>
@@ -4513,7 +4513,7 @@
                 <a:ea typeface="Calibri"/>
                 <a:cs typeface="Calibri"/>
               </a:rPr>
-              <a:t>Stöd till övning 2</a:t>
+              <a:t>Stöd till övning 3.2</a:t>
             </a:r>
           </a:p>
         </p:txBody>
@@ -4902,7 +4902,7 @@
                 <a:ea typeface="Calibri"/>
                 <a:cs typeface="Calibri"/>
               </a:rPr>
-              <a:t>Övning 2</a:t>
+              <a:t>Övning 3.2</a:t>
             </a:r>
           </a:p>
         </p:txBody>
@@ -5237,7 +5237,7 @@
                 <a:ea typeface="Calibri"/>
                 <a:cs typeface="Calibri"/>
               </a:rPr>
-              <a:t>Stöd till övning 3</a:t>
+              <a:t>Stöd till övning 3.3</a:t>
             </a:r>
           </a:p>
         </p:txBody>
@@ -5626,7 +5626,7 @@
                 <a:ea typeface="Calibri"/>
                 <a:cs typeface="Calibri"/>
               </a:rPr>
-              <a:t>Övning 3</a:t>
+              <a:t>Övning 3.3</a:t>
             </a:r>
           </a:p>
         </p:txBody>
@@ -5961,7 +5961,7 @@
                 <a:ea typeface="Calibri"/>
                 <a:cs typeface="Calibri"/>
               </a:rPr>
-              <a:t>Stöd till övning 4</a:t>
+              <a:t>Stöd till övning 3.4</a:t>
             </a:r>
           </a:p>
         </p:txBody>
@@ -6504,7 +6504,7 @@
                 <a:ea typeface="Calibri"/>
                 <a:cs typeface="Calibri"/>
               </a:rPr>
-              <a:t>Övning 4</a:t>
+              <a:t>Övning 3.4</a:t>
             </a:r>
           </a:p>
         </p:txBody>
@@ -6863,7 +6863,7 @@
                 <a:ea typeface="Calibri"/>
                 <a:cs typeface="Calibri"/>
               </a:rPr>
-              <a:t>Stöd till övning 5</a:t>
+              <a:t>Stöd till övning 3.5</a:t>
             </a:r>
           </a:p>
         </p:txBody>
@@ -7252,7 +7252,7 @@
                 <a:ea typeface="Calibri"/>
                 <a:cs typeface="Calibri"/>
               </a:rPr>
-              <a:t>Övning 5</a:t>
+              <a:t>Övning 3.5</a:t>
             </a:r>
           </a:p>
         </p:txBody>
@@ -10034,7 +10034,7 @@
                 <a:ea typeface="Calibri"/>
                 <a:cs typeface="Calibri"/>
               </a:rPr>
-              <a:t>Stöd till övning 6</a:t>
+              <a:t>Stöd till övning 3.6</a:t>
             </a:r>
           </a:p>
         </p:txBody>
@@ -10423,7 +10423,7 @@
                 <a:ea typeface="Calibri"/>
                 <a:cs typeface="Calibri"/>
               </a:rPr>
-              <a:t>Övning 6</a:t>
+              <a:t>Övning 3.6</a:t>
             </a:r>
           </a:p>
         </p:txBody>
@@ -10782,7 +10782,7 @@
                 <a:ea typeface="Calibri"/>
                 <a:cs typeface="Calibri"/>
               </a:rPr>
-              <a:t>Stöd till övning 7</a:t>
+              <a:t>Stöd till övning 3.7</a:t>
             </a:r>
           </a:p>
         </p:txBody>
@@ -11171,7 +11171,7 @@
                 <a:ea typeface="Calibri"/>
                 <a:cs typeface="Calibri"/>
               </a:rPr>
-              <a:t>Övning 7</a:t>
+              <a:t>Övning 3.7</a:t>
             </a:r>
           </a:p>
         </p:txBody>
@@ -11506,7 +11506,7 @@
                 <a:ea typeface="Calibri"/>
                 <a:cs typeface="Calibri"/>
               </a:rPr>
-              <a:t>Stöd till övning 8</a:t>
+              <a:t>Stöd till övning 3.8</a:t>
             </a:r>
           </a:p>
         </p:txBody>
@@ -12432,7 +12432,7 @@
                 <a:ea typeface="Calibri"/>
                 <a:cs typeface="Calibri"/>
               </a:rPr>
-              <a:t>Övning 8</a:t>
+              <a:t>Övning 3.8</a:t>
             </a:r>
           </a:p>
         </p:txBody>
@@ -12767,7 +12767,7 @@
                 <a:ea typeface="Calibri"/>
                 <a:cs typeface="Calibri"/>
               </a:rPr>
-              <a:t>Stöd till övning 9</a:t>
+              <a:t>Stöd till övning 3.9</a:t>
             </a:r>
           </a:p>
         </p:txBody>
@@ -13245,7 +13245,7 @@
                 <a:ea typeface="Calibri"/>
                 <a:cs typeface="Calibri"/>
               </a:rPr>
-              <a:t>Övning 9</a:t>
+              <a:t>Övning 3.9</a:t>
             </a:r>
           </a:p>
         </p:txBody>
@@ -13580,7 +13580,7 @@
                 <a:ea typeface="Calibri"/>
                 <a:cs typeface="Calibri"/>
               </a:rPr>
-              <a:t>Stöd till övning 10</a:t>
+              <a:t>Stöd till övning 3.10</a:t>
             </a:r>
           </a:p>
         </p:txBody>
@@ -13969,7 +13969,7 @@
                 <a:ea typeface="Calibri"/>
                 <a:cs typeface="Calibri"/>
               </a:rPr>
-              <a:t>Övning 10</a:t>
+              <a:t>Övning 3.10</a:t>
             </a:r>
           </a:p>
         </p:txBody>

--- a/sjoskolan/vecka-44/aktuell/v44_03_Fordjupad_matteknik_elev.pptx
+++ b/sjoskolan/vecka-44/aktuell/v44_03_Fordjupad_matteknik_elev.pptx
@@ -8146,7 +8146,7 @@
                 <a:ea typeface="Calibri"/>
                 <a:cs typeface="Calibri"/>
               </a:rPr>
-              <a:t>Teori och exempel följs av övning 6–10.</a:t>
+              <a:t>Teori och exempel följs av övning 3.6–3.10.</a:t>
             </a:r>
           </a:p>
           <a:p xmlns:a="http://schemas.openxmlformats.org/drawingml/2006/main">
@@ -12054,7 +12054,7 @@
                 <a:ea typeface="Calibri"/>
                 <a:cs typeface="Calibri"/>
               </a:rPr>
-              <a:t>15 min övning 1, 2, 4, 5 min återkoppling</a:t>
+              <a:t>15 min övning 3.1, 3.2 och 3.4, 5 min återkoppling</a:t>
             </a:r>
           </a:p>
         </p:txBody>
@@ -12168,7 +12168,7 @@
                 <a:ea typeface="Calibri"/>
                 <a:cs typeface="Calibri"/>
               </a:rPr>
-              <a:t>20 min teori och exempel, 15 min övning 6, 7, 8</a:t>
+              <a:t>20 min teori och exempel, 15 min övning 3.6, 3.7 och 3.8</a:t>
             </a:r>
           </a:p>
           <a:p xmlns:a="http://schemas.openxmlformats.org/drawingml/2006/main">

--- a/sjoskolan/vecka-44/aktuell/v44_03_Fordjupad_matteknik_elev.pptx
+++ b/sjoskolan/vecka-44/aktuell/v44_03_Fordjupad_matteknik_elev.pptx
@@ -4570,7 +4570,29 @@
                 <a:ea typeface="Calibri"/>
                 <a:cs typeface="Calibri"/>
               </a:rPr>
-              <a:t>I = Utång/k</a:t>
+              <a:t>I = U</a:t>
+            </a:r>
+            <a:r>
+              <a:rPr sz="2400" b="1" baseline="-25000">
+                <a:solidFill>
+                  <a:srgbClr val="064F91"/>
+                </a:solidFill>
+                <a:latin typeface="Calibri"/>
+                <a:ea typeface="Calibri"/>
+                <a:cs typeface="Calibri"/>
+              </a:rPr>
+              <a:t>tång</a:t>
+            </a:r>
+            <a:r>
+              <a:rPr sz="2400" b="1">
+                <a:solidFill>
+                  <a:srgbClr val="064F91"/>
+                </a:solidFill>
+                <a:latin typeface="Calibri"/>
+                <a:ea typeface="Calibri"/>
+                <a:cs typeface="Calibri"/>
+              </a:rPr>
+              <a:t>/k</a:t>
             </a:r>
           </a:p>
         </p:txBody>
@@ -4627,7 +4649,29 @@
                 <a:ea typeface="Calibri"/>
                 <a:cs typeface="Calibri"/>
               </a:rPr>
-              <a:t>k är tångens känslighet i mV/A och Utång dess utspänning i mV.</a:t>
+              <a:t>k är tångens känslighet i mV/A och U</a:t>
+            </a:r>
+            <a:r>
+              <a:rPr sz="2100" b="0" baseline="-25000">
+                <a:solidFill>
+                  <a:srgbClr val="111111"/>
+                </a:solidFill>
+                <a:latin typeface="Calibri"/>
+                <a:ea typeface="Calibri"/>
+                <a:cs typeface="Calibri"/>
+              </a:rPr>
+              <a:t>tång</a:t>
+            </a:r>
+            <a:r>
+              <a:rPr sz="2100" b="0">
+                <a:solidFill>
+                  <a:srgbClr val="111111"/>
+                </a:solidFill>
+                <a:latin typeface="Calibri"/>
+                <a:ea typeface="Calibri"/>
+                <a:cs typeface="Calibri"/>
+              </a:rPr>
+              <a:t> dess utspänning i mV.</a:t>
             </a:r>
           </a:p>
         </p:txBody>
@@ -5294,7 +5338,40 @@
                 <a:ea typeface="Calibri"/>
                 <a:cs typeface="Calibri"/>
               </a:rPr>
-              <a:t>R = Uprov/Iläck</a:t>
+              <a:t>R = U</a:t>
+            </a:r>
+            <a:r>
+              <a:rPr sz="2400" b="1" baseline="-25000">
+                <a:solidFill>
+                  <a:srgbClr val="064F91"/>
+                </a:solidFill>
+                <a:latin typeface="Calibri"/>
+                <a:ea typeface="Calibri"/>
+                <a:cs typeface="Calibri"/>
+              </a:rPr>
+              <a:t>prov</a:t>
+            </a:r>
+            <a:r>
+              <a:rPr sz="2400" b="1">
+                <a:solidFill>
+                  <a:srgbClr val="064F91"/>
+                </a:solidFill>
+                <a:latin typeface="Calibri"/>
+                <a:ea typeface="Calibri"/>
+                <a:cs typeface="Calibri"/>
+              </a:rPr>
+              <a:t>/I</a:t>
+            </a:r>
+            <a:r>
+              <a:rPr sz="2400" b="1" baseline="-25000">
+                <a:solidFill>
+                  <a:srgbClr val="064F91"/>
+                </a:solidFill>
+                <a:latin typeface="Calibri"/>
+                <a:ea typeface="Calibri"/>
+                <a:cs typeface="Calibri"/>
+              </a:rPr>
+              <a:t>läck</a:t>
             </a:r>
           </a:p>
         </p:txBody>

--- a/sjoskolan/vecka-44/aktuell/v44_03_Fordjupad_matteknik_elev.pptx
+++ b/sjoskolan/vecka-44/aktuell/v44_03_Fordjupad_matteknik_elev.pptx
@@ -3903,7 +3903,7 @@
                 <a:ea typeface="Calibri"/>
                 <a:cs typeface="Calibri"/>
               </a:rPr>
-              <a:t>Strömmarna fram och tillbaka går åt olika håll, så deras magnetfält tar ut varandra när tången omsluter båda ledarna.</a:t>
+              <a:t>Tången känner magnetfältet från alla strömmar som går genom den. Ström åt ena hållet räknas plus, åt andra hållet minus.</a:t>
             </a:r>
           </a:p>
         </p:txBody>
@@ -10916,7 +10916,40 @@
                 <a:ea typeface="Calibri"/>
                 <a:cs typeface="Calibri"/>
               </a:rPr>
-              <a:t>ûverklig = probfaktor · ûvisad</a:t>
+              <a:t>û</a:t>
+            </a:r>
+            <a:r>
+              <a:rPr sz="2400" b="1" baseline="-25000">
+                <a:solidFill>
+                  <a:srgbClr val="064F91"/>
+                </a:solidFill>
+                <a:latin typeface="Calibri"/>
+                <a:ea typeface="Calibri"/>
+                <a:cs typeface="Calibri"/>
+              </a:rPr>
+              <a:t>verklig</a:t>
+            </a:r>
+            <a:r>
+              <a:rPr sz="2400" b="1">
+                <a:solidFill>
+                  <a:srgbClr val="064F91"/>
+                </a:solidFill>
+                <a:latin typeface="Calibri"/>
+                <a:ea typeface="Calibri"/>
+                <a:cs typeface="Calibri"/>
+              </a:rPr>
+              <a:t> = probfaktor · û</a:t>
+            </a:r>
+            <a:r>
+              <a:rPr sz="2400" b="1" baseline="-25000">
+                <a:solidFill>
+                  <a:srgbClr val="064F91"/>
+                </a:solidFill>
+                <a:latin typeface="Calibri"/>
+                <a:ea typeface="Calibri"/>
+                <a:cs typeface="Calibri"/>
+              </a:rPr>
+              <a:t>visad</a:t>
             </a:r>
           </a:p>
         </p:txBody>
@@ -12625,7 +12658,7 @@
                 <a:ea typeface="Calibri"/>
                 <a:cs typeface="Calibri"/>
               </a:rPr>
-              <a:t>Instrumentet visar 100,0 V. Specifikationen är ±(0,5 % + 2 siffror) och upplösningen 0,1 V. Beräkna felgränsen och intervallet.</a:t>
+              <a:t>Instrumentet visar 100,0 V. Det kan visa fel med högst ±(0,5 % + 2 siffror). ”2 siffror” betyder 2 steg i sista siffran. Ett steg är 0,1 V. Hur stort kan felet bli? Mellan vilka värden ligger den rätta spänningen?</a:t>
             </a:r>
           </a:p>
         </p:txBody>
@@ -12990,7 +13023,40 @@
                 <a:ea typeface="Calibri"/>
                 <a:cs typeface="Calibri"/>
               </a:rPr>
-              <a:t>Variationsbredd = xmax − xmin</a:t>
+              <a:t>Variationsbredd = x</a:t>
+            </a:r>
+            <a:r>
+              <a:rPr sz="2400" b="1" baseline="-25000">
+                <a:solidFill>
+                  <a:srgbClr val="064F91"/>
+                </a:solidFill>
+                <a:latin typeface="Calibri"/>
+                <a:ea typeface="Calibri"/>
+                <a:cs typeface="Calibri"/>
+              </a:rPr>
+              <a:t>max</a:t>
+            </a:r>
+            <a:r>
+              <a:rPr sz="2400" b="1">
+                <a:solidFill>
+                  <a:srgbClr val="064F91"/>
+                </a:solidFill>
+                <a:latin typeface="Calibri"/>
+                <a:ea typeface="Calibri"/>
+                <a:cs typeface="Calibri"/>
+              </a:rPr>
+              <a:t> − x</a:t>
+            </a:r>
+            <a:r>
+              <a:rPr sz="2400" b="1" baseline="-25000">
+                <a:solidFill>
+                  <a:srgbClr val="064F91"/>
+                </a:solidFill>
+                <a:latin typeface="Calibri"/>
+                <a:ea typeface="Calibri"/>
+                <a:cs typeface="Calibri"/>
+              </a:rPr>
+              <a:t>min</a:t>
             </a:r>
           </a:p>
         </p:txBody>
@@ -13771,7 +13837,7 @@
                 <a:ea typeface="Calibri"/>
                 <a:cs typeface="Calibri"/>
               </a:rPr>
-              <a:t>Provspänning, mättid, temperatur, fukt och inkopplad utrustning påverkar värdet.</a:t>
+              <a:t>Ett isolationsvärde beror inte bara på isoleringen. Det beror också på hur och när du mätte.</a:t>
             </a:r>
           </a:p>
         </p:txBody>
@@ -14162,7 +14228,7 @@
                 <a:ea typeface="Calibri"/>
                 <a:cs typeface="Calibri"/>
               </a:rPr>
-              <a:t>En isolationsmätning ändras från 100 MΩ till 10 MΩ. Varför räcker det inte att direkt säga att isoleringen har skadats?</a:t>
+              <a:t>Förra gången visade isolationsmätningen 100 MΩ. Nu visar den 10 MΩ. Varför kan du inte direkt säga att isoleringen är skadad?</a:t>
             </a:r>
           </a:p>
         </p:txBody>

--- a/sjoskolan/vecka-44/aktuell/v44_03_Fordjupad_matteknik_elev.pptx
+++ b/sjoskolan/vecka-44/aktuell/v44_03_Fordjupad_matteknik_elev.pptx
@@ -6643,7 +6643,7 @@
                 </a:solidFill>
                 <a:latin typeface="Calibri"/>
               </a:rPr>
-              <a:t>1. Läs del 3: alla sju avsnitt och de två exemplen.</a:t>
+              <a:t>1. Läs del 3: alla sju avsnitt och de två exemplen. Tryck på ”Jag har läst del 3” längst ned på sidan.</a:t>
             </a:r>
           </a:p>
           <a:p>

--- a/sjoskolan/vecka-44/aktuell/v44_03_Fordjupad_matteknik_elev.pptx
+++ b/sjoskolan/vecka-44/aktuell/v44_03_Fordjupad_matteknik_elev.pptx
@@ -6101,7 +6101,7 @@
                 </a:solidFill>
                 <a:latin typeface="Calibri"/>
               </a:rPr>
-              <a:t>Bifoga beräkningar, mätvillkor, felgränser och motiverade slutsatser. Inlämningen senast fredag 30 oktober.</a:t>
+              <a:t>Inlämning 3 (Isolationslabbet) och 4 (analysen av mätdata) bygger på det här: mätvillkor och felgräns hör till resultatet. Inlämningen senast fredag 30 oktober.</a:t>
             </a:r>
           </a:p>
         </p:txBody>
@@ -6662,7 +6662,7 @@
                 </a:solidFill>
                 <a:latin typeface="Calibri"/>
               </a:rPr>
-              <a:t>2. Gör övning 3.4–3.6 på delsidan. Ledtrådar och facit finns där.</a:t>
+              <a:t>2. Gör övning 3.4–3.6 på delsidan. Övning 3.7–3.10 är extra. Ledtrådar och facit finns där.</a:t>
             </a:r>
           </a:p>
           <a:p>
@@ -6700,7 +6700,7 @@
                 </a:solidFill>
                 <a:latin typeface="Calibri"/>
               </a:rPr>
-              <a:t>4. Gör isolationsmätningen i Isolationslabbet. Den hör till inlämning 3.</a:t>
+              <a:t>4. Isolationslabbet: gör räkna-först-uppgifterna om isolationsresistans och isolationsprovning och mätning 6–8. Spara protokollet som PDF. Det hör till inlämning 3.</a:t>
             </a:r>
           </a:p>
           <a:p>
@@ -6719,7 +6719,7 @@
                 </a:solidFill>
                 <a:latin typeface="Calibri"/>
               </a:rPr>
-              <a:t>5. Efter pausen 16.00: del 4, Analys av mätresultat.</a:t>
+              <a:t>5. Klockan 16.00: del 4, Analys av mätresultat.</a:t>
             </a:r>
           </a:p>
           <a:p>
@@ -6738,7 +6738,7 @@
                 </a:solidFill>
                 <a:latin typeface="Calibri"/>
               </a:rPr>
-              <a:t>Inlämningen och analysen av mätdata senast fredag 30 oktober. Allt finns på veckosidan.</a:t>
+              <a:t>Inlämningen, uppgift 1–4, senast fredag 30 oktober. Allt finns på veckosidan.</a:t>
             </a:r>
           </a:p>
         </p:txBody>
